--- a/foundry-patterns.pptx
+++ b/foundry-patterns.pptx
@@ -9206,7 +9206,7 @@
                 </a:solidFill>
                 <a:latin typeface="Segoe UI"/>
               </a:rPr>
-              <a:t>Microsoft IQ — Web IQ + Foundry IQ</a:t>
+              <a:t>Microsoft IQ — The Grounding Layer</a:t>
             </a:r>
           </a:p>
         </p:txBody>
@@ -9296,8 +9296,8 @@
         </p:nvSpPr>
         <p:spPr>
           <a:xfrm>
-            <a:off x="4572000" y="4343400"/>
-            <a:ext cx="2926080" cy="731520"/>
+            <a:off x="3200400" y="4370832"/>
+            <a:ext cx="2651760" cy="621792"/>
           </a:xfrm>
           <a:prstGeom prst="roundRect">
             <a:avLst/>
@@ -9364,8 +9364,8 @@
         </p:nvSpPr>
         <p:spPr>
           <a:xfrm>
-            <a:off x="2286000" y="3017520"/>
-            <a:ext cx="2194560" cy="868680"/>
+            <a:off x="2194560" y="3017520"/>
+            <a:ext cx="1920240" cy="868680"/>
           </a:xfrm>
           <a:prstGeom prst="roundRect">
             <a:avLst/>
@@ -9429,7 +9429,7 @@
         </p:nvSpPr>
         <p:spPr>
           <a:xfrm>
-            <a:off x="4846320" y="3017520"/>
+            <a:off x="5669280" y="3017520"/>
             <a:ext cx="1828800" cy="868680"/>
           </a:xfrm>
           <a:prstGeom prst="roundRect">
@@ -9494,8 +9494,8 @@
         </p:nvSpPr>
         <p:spPr>
           <a:xfrm>
-            <a:off x="7315200" y="2194560"/>
-            <a:ext cx="3657600" cy="731520"/>
+            <a:off x="7772400" y="2103120"/>
+            <a:ext cx="3566160" cy="566928"/>
           </a:xfrm>
           <a:prstGeom prst="roundRect">
             <a:avLst/>
@@ -9536,7 +9536,7 @@
                 </a:solidFill>
                 <a:latin typeface="Segoe UI"/>
               </a:rPr>
-              <a:t>Web IQ (MCP) — cited web</a:t>
+              <a:t>Web IQ — cited live web</a:t>
             </a:r>
           </a:p>
         </p:txBody>
@@ -9549,8 +9549,8 @@
         </p:nvSpPr>
         <p:spPr>
           <a:xfrm>
-            <a:off x="7315200" y="3154680"/>
-            <a:ext cx="3657600" cy="731520"/>
+            <a:off x="7772400" y="2834640"/>
+            <a:ext cx="3566160" cy="566928"/>
           </a:xfrm>
           <a:prstGeom prst="roundRect">
             <a:avLst/>
@@ -9591,7 +9591,7 @@
                 </a:solidFill>
                 <a:latin typeface="Segoe UI"/>
               </a:rPr>
-              <a:t>Foundry IQ — Azure AI Search</a:t>
+              <a:t>Foundry IQ — enterprise knowledge</a:t>
             </a:r>
           </a:p>
         </p:txBody>
@@ -9604,8 +9604,8 @@
         </p:nvSpPr>
         <p:spPr>
           <a:xfrm>
-            <a:off x="7315200" y="4114800"/>
-            <a:ext cx="3657600" cy="731520"/>
+            <a:off x="7772400" y="3566160"/>
+            <a:ext cx="3566160" cy="566928"/>
           </a:xfrm>
           <a:prstGeom prst="roundRect">
             <a:avLst/>
@@ -9647,6 +9647,62 @@
                 </a:solidFill>
                 <a:latin typeface="Segoe UI"/>
               </a:rPr>
+              <a:t>Fabric IQ — business data · KPIs</a:t>
+            </a:r>
+          </a:p>
+        </p:txBody>
+      </p:sp>
+      <p:sp>
+        <p:nvSpPr>
+          <p:cNvPr id="14" name="Rounded Rectangle 13"/>
+          <p:cNvSpPr/>
+          <p:nvPr/>
+        </p:nvSpPr>
+        <p:spPr>
+          <a:xfrm>
+            <a:off x="7772400" y="4297680"/>
+            <a:ext cx="3566160" cy="566928"/>
+          </a:xfrm>
+          <a:prstGeom prst="roundRect">
+            <a:avLst/>
+          </a:prstGeom>
+          <a:solidFill>
+            <a:srgbClr val="FFFFFF"/>
+          </a:solidFill>
+          <a:ln w="15875">
+            <a:solidFill>
+              <a:srgbClr val="B3B0AD"/>
+            </a:solidFill>
+            <a:prstDash val="dash"/>
+          </a:ln>
+          <a:effectLst/>
+        </p:spPr>
+        <p:style>
+          <a:lnRef idx="1">
+            <a:schemeClr val="accent1"/>
+          </a:lnRef>
+          <a:fillRef idx="3">
+            <a:schemeClr val="accent1"/>
+          </a:fillRef>
+          <a:effectRef idx="2">
+            <a:schemeClr val="accent1"/>
+          </a:effectRef>
+          <a:fontRef idx="minor">
+            <a:schemeClr val="lt1"/>
+          </a:fontRef>
+        </p:style>
+        <p:txBody>
+          <a:bodyPr rtlCol="0" anchor="ctr" wrap="square" lIns="54864" rIns="54864" tIns="18288" bIns="18288"/>
+          <a:lstStyle/>
+          <a:p>
+            <a:pPr algn="ctr"/>
+            <a:r>
+              <a:rPr sz="1200" b="1" i="0">
+                <a:solidFill>
+                  <a:srgbClr val="605E5C"/>
+                </a:solidFill>
+                <a:latin typeface="Segoe UI"/>
+              </a:rPr>
               <a:t>Work IQ — M365 org context</a:t>
             </a:r>
           </a:p>
@@ -9654,14 +9710,14 @@
       </p:sp>
       <p:cxnSp>
         <p:nvCxnSpPr>
-          <p:cNvPr id="14" name="Connector 13"/>
+          <p:cNvPr id="15" name="Connector 14"/>
           <p:cNvCxnSpPr/>
           <p:nvPr/>
         </p:nvCxnSpPr>
         <p:spPr>
           <a:xfrm>
-            <a:off x="4480560" y="3451860"/>
-            <a:ext cx="365760" cy="0"/>
+            <a:off x="4114800" y="3451860"/>
+            <a:ext cx="1554480" cy="0"/>
           </a:xfrm>
           <a:prstGeom prst="line">
             <a:avLst/>
@@ -9690,13 +9746,13 @@
       </p:cxnSp>
       <p:sp>
         <p:nvSpPr>
-          <p:cNvPr id="15" name="TextBox 14"/>
+          <p:cNvPr id="16" name="TextBox 15"/>
           <p:cNvSpPr txBox="1"/>
           <p:nvPr/>
         </p:nvSpPr>
         <p:spPr>
           <a:xfrm>
-            <a:off x="3977640" y="3296412"/>
+            <a:off x="4206240" y="3296412"/>
             <a:ext cx="1371600" cy="310896"/>
           </a:xfrm>
           <a:prstGeom prst="rect">
@@ -9730,14 +9786,14 @@
       </p:sp>
       <p:cxnSp>
         <p:nvCxnSpPr>
-          <p:cNvPr id="16" name="Connector 15"/>
+          <p:cNvPr id="17" name="Connector 16"/>
           <p:cNvCxnSpPr/>
           <p:nvPr/>
         </p:nvCxnSpPr>
         <p:spPr>
           <a:xfrm flipV="1">
-            <a:off x="6675120" y="2560320"/>
-            <a:ext cx="640080" cy="891540"/>
+            <a:off x="7498080" y="2386584"/>
+            <a:ext cx="274320" cy="1065276"/>
           </a:xfrm>
           <a:prstGeom prst="line">
             <a:avLst/>
@@ -9766,14 +9822,14 @@
       </p:cxnSp>
       <p:cxnSp>
         <p:nvCxnSpPr>
-          <p:cNvPr id="17" name="Connector 16"/>
+          <p:cNvPr id="18" name="Connector 17"/>
           <p:cNvCxnSpPr/>
           <p:nvPr/>
         </p:nvCxnSpPr>
         <p:spPr>
-          <a:xfrm>
-            <a:off x="6675120" y="3451860"/>
-            <a:ext cx="640080" cy="68580"/>
+          <a:xfrm flipV="1">
+            <a:off x="7498080" y="3118104"/>
+            <a:ext cx="274320" cy="333756"/>
           </a:xfrm>
           <a:prstGeom prst="line">
             <a:avLst/>
@@ -9802,14 +9858,14 @@
       </p:cxnSp>
       <p:cxnSp>
         <p:nvCxnSpPr>
-          <p:cNvPr id="18" name="Connector 17"/>
+          <p:cNvPr id="19" name="Connector 18"/>
           <p:cNvCxnSpPr/>
           <p:nvPr/>
         </p:nvCxnSpPr>
         <p:spPr>
           <a:xfrm>
-            <a:off x="6675120" y="3451860"/>
-            <a:ext cx="640080" cy="1028700"/>
+            <a:off x="7498080" y="3451860"/>
+            <a:ext cx="274320" cy="397764"/>
           </a:xfrm>
           <a:prstGeom prst="line">
             <a:avLst/>
@@ -9839,14 +9895,14 @@
       </p:cxnSp>
       <p:cxnSp>
         <p:nvCxnSpPr>
-          <p:cNvPr id="19" name="Connector 18"/>
+          <p:cNvPr id="20" name="Connector 19"/>
           <p:cNvCxnSpPr/>
           <p:nvPr/>
         </p:nvCxnSpPr>
         <p:spPr>
-          <a:xfrm flipH="1" flipV="1">
-            <a:off x="5760720" y="3886200"/>
-            <a:ext cx="274320" cy="457200"/>
+          <a:xfrm>
+            <a:off x="7498080" y="3451860"/>
+            <a:ext cx="274320" cy="1129284"/>
           </a:xfrm>
           <a:prstGeom prst="line">
             <a:avLst/>
@@ -9874,9 +9930,46 @@
           </a:fontRef>
         </p:style>
       </p:cxnSp>
-      <p:sp>
-        <p:nvSpPr>
-          <p:cNvPr id="20" name="TextBox 19"/>
+      <p:cxnSp>
+        <p:nvCxnSpPr>
+          <p:cNvPr id="21" name="Connector 20"/>
+          <p:cNvCxnSpPr/>
+          <p:nvPr/>
+        </p:nvCxnSpPr>
+        <p:spPr>
+          <a:xfrm flipV="1">
+            <a:off x="4526280" y="3886200"/>
+            <a:ext cx="2057400" cy="484632"/>
+          </a:xfrm>
+          <a:prstGeom prst="line">
+            <a:avLst/>
+          </a:prstGeom>
+          <a:ln w="22225">
+            <a:solidFill>
+              <a:srgbClr val="605E5C"/>
+            </a:solidFill>
+            <a:prstDash val="dash"/>
+            <a:tailEnd type="triangle"/>
+          </a:ln>
+        </p:spPr>
+        <p:style>
+          <a:lnRef idx="2">
+            <a:schemeClr val="accent1"/>
+          </a:lnRef>
+          <a:fillRef idx="0">
+            <a:schemeClr val="accent1"/>
+          </a:fillRef>
+          <a:effectRef idx="1">
+            <a:schemeClr val="accent1"/>
+          </a:effectRef>
+          <a:fontRef idx="minor">
+            <a:schemeClr val="tx1"/>
+          </a:fontRef>
+        </p:style>
+      </p:cxnSp>
+      <p:sp>
+        <p:nvSpPr>
+          <p:cNvPr id="22" name="TextBox 21"/>
           <p:cNvSpPr txBox="1"/>
           <p:nvPr/>
         </p:nvSpPr>
@@ -9910,7 +10003,7 @@
       </p:sp>
       <p:sp>
         <p:nvSpPr>
-          <p:cNvPr id="21" name="Rounded Rectangle 20"/>
+          <p:cNvPr id="23" name="Rounded Rectangle 22"/>
           <p:cNvSpPr/>
           <p:nvPr/>
         </p:nvSpPr>
@@ -9974,7 +10067,7 @@
       </p:sp>
       <p:sp>
         <p:nvSpPr>
-          <p:cNvPr id="22" name="Rounded Rectangle 21"/>
+          <p:cNvPr id="24" name="Rounded Rectangle 23"/>
           <p:cNvSpPr/>
           <p:nvPr/>
         </p:nvSpPr>
@@ -10038,7 +10131,7 @@
       </p:sp>
       <p:sp>
         <p:nvSpPr>
-          <p:cNvPr id="23" name="Rounded Rectangle 22"/>
+          <p:cNvPr id="25" name="Rounded Rectangle 24"/>
           <p:cNvSpPr/>
           <p:nvPr/>
         </p:nvSpPr>
@@ -10095,7 +10188,7 @@
                 </a:solidFill>
                 <a:latin typeface="Segoe UI"/>
               </a:rPr>
-              <a:t>Org context (Work IQ / M365) — a moat AWS can't match</a:t>
+              <a:t>Four layers: web, enterprise, business data, org context — a moat AWS can't match</a:t>
             </a:r>
           </a:p>
         </p:txBody>

--- a/foundry-patterns.pptx
+++ b/foundry-patterns.pptx
@@ -9206,7 +9206,7 @@
                 </a:solidFill>
                 <a:latin typeface="Segoe UI"/>
               </a:rPr>
-              <a:t>Microsoft IQ — The Grounding Layer</a:t>
+              <a:t>Microsoft IQ — The Intelligence Layer</a:t>
             </a:r>
           </a:p>
         </p:txBody>

--- a/foundry-patterns.pptx
+++ b/foundry-patterns.pptx
@@ -4731,7 +4731,7 @@
                 <a:ea typeface="Segoe UI" pitchFamily="34" charset="-122"/>
                 <a:cs typeface="Segoe UI" pitchFamily="34" charset="-120"/>
               </a:rPr>
-              <a:t>Classified as Microsoft Confidential</a:t>
+              <a:t/>
             </a:r>
             <a:endParaRPr kumimoji="0" lang="en-US" sz="900" b="0" i="0" u="none" strike="noStrike" kern="1200" cap="none" spc="0" normalizeH="0" baseline="0" noProof="0" dirty="0">
               <a:ln>
@@ -7911,7 +7911,7 @@
                 <a:ea typeface="Segoe UI" pitchFamily="34" charset="-122"/>
                 <a:cs typeface="Segoe UI" pitchFamily="34" charset="-120"/>
               </a:rPr>
-              <a:t>Microsoft Confidential  ·  Foundry pattern catalog  ·  subject to change</a:t>
+              <a:t>Foundry pattern library  ·  subject to change</a:t>
             </a:r>
             <a:endParaRPr kumimoji="0" lang="en-US" sz="900" b="0" i="0" u="none" strike="noStrike" kern="1200" cap="none" spc="0" normalizeH="0" baseline="0" noProof="0" dirty="0">
               <a:ln>
@@ -10820,7 +10820,7 @@
                 <a:ea typeface="Segoe UI" pitchFamily="34" charset="-122"/>
                 <a:cs typeface="Segoe UI" pitchFamily="34" charset="-120"/>
               </a:rPr>
-              <a:t>Microsoft Confidential  ·  Foundry pattern catalog  ·  subject to change</a:t>
+              <a:t>Foundry pattern library  ·  subject to change</a:t>
             </a:r>
             <a:endParaRPr kumimoji="0" lang="en-US" sz="900" b="0" i="0" u="none" strike="noStrike" kern="1200" cap="none" spc="0" normalizeH="0" baseline="0" noProof="0" dirty="0">
               <a:ln>
@@ -13899,7 +13899,7 @@
                 <a:ea typeface="Segoe UI" pitchFamily="34" charset="-122"/>
                 <a:cs typeface="Segoe UI" pitchFamily="34" charset="-120"/>
               </a:rPr>
-              <a:t>Microsoft Confidential  ·  Foundry pattern catalog  ·  subject to change</a:t>
+              <a:t>Foundry pattern library  ·  subject to change</a:t>
             </a:r>
             <a:endParaRPr kumimoji="0" lang="en-US" sz="900" b="0" i="0" u="none" strike="noStrike" kern="1200" cap="none" spc="0" normalizeH="0" baseline="0" noProof="0" dirty="0">
               <a:ln>
@@ -14801,7 +14801,7 @@
                 <a:ea typeface="Segoe UI" pitchFamily="34" charset="-122"/>
                 <a:cs typeface="Segoe UI" pitchFamily="34" charset="-120"/>
               </a:rPr>
-              <a:t>Classified as Microsoft Confidential</a:t>
+              <a:t/>
             </a:r>
             <a:endParaRPr kumimoji="0" lang="en-US" sz="900" b="0" i="0" u="none" strike="noStrike" kern="1200" cap="none" spc="0" normalizeH="0" baseline="0" noProof="0" dirty="0">
               <a:ln>
@@ -17325,7 +17325,7 @@
                 <a:ea typeface="Segoe UI" pitchFamily="34" charset="-122"/>
                 <a:cs typeface="Segoe UI" pitchFamily="34" charset="-120"/>
               </a:rPr>
-              <a:t>Microsoft Confidential  ·  Foundry pattern catalog  ·  subject to change</a:t>
+              <a:t>Foundry pattern library  ·  subject to change</a:t>
             </a:r>
             <a:endParaRPr kumimoji="0" lang="en-US" sz="900" b="0" i="0" u="none" strike="noStrike" kern="1200" cap="none" spc="0" normalizeH="0" baseline="0" noProof="0" dirty="0">
               <a:ln>
@@ -20126,7 +20126,7 @@
                 <a:ea typeface="Segoe UI" pitchFamily="34" charset="-122"/>
                 <a:cs typeface="Segoe UI" pitchFamily="34" charset="-120"/>
               </a:rPr>
-              <a:t>Microsoft Confidential  ·  Foundry pattern catalog  ·  subject to change</a:t>
+              <a:t>Foundry pattern library  ·  subject to change</a:t>
             </a:r>
             <a:endParaRPr kumimoji="0" lang="en-US" sz="900" b="0" i="0" u="none" strike="noStrike" kern="1200" cap="none" spc="0" normalizeH="0" baseline="0" noProof="0" dirty="0">
               <a:ln>
@@ -21028,7 +21028,7 @@
                 <a:ea typeface="Segoe UI" pitchFamily="34" charset="-122"/>
                 <a:cs typeface="Segoe UI" pitchFamily="34" charset="-120"/>
               </a:rPr>
-              <a:t>Classified as Microsoft Confidential</a:t>
+              <a:t/>
             </a:r>
             <a:endParaRPr kumimoji="0" lang="en-US" sz="900" b="0" i="0" u="none" strike="noStrike" kern="1200" cap="none" spc="0" normalizeH="0" baseline="0" noProof="0" dirty="0">
               <a:ln>
@@ -24400,7 +24400,7 @@
                 <a:ea typeface="Segoe UI" pitchFamily="34" charset="-122"/>
                 <a:cs typeface="Segoe UI" pitchFamily="34" charset="-120"/>
               </a:rPr>
-              <a:t>Microsoft Confidential  ·  Foundry pattern catalog  ·  subject to change</a:t>
+              <a:t>Foundry pattern library  ·  subject to change</a:t>
             </a:r>
             <a:endParaRPr kumimoji="0" lang="en-US" sz="900" b="0" i="0" u="none" strike="noStrike" kern="1200" cap="none" spc="0" normalizeH="0" baseline="0" noProof="0" dirty="0">
               <a:ln>
@@ -27367,7 +27367,7 @@
                 <a:ea typeface="Segoe UI" pitchFamily="34" charset="-122"/>
                 <a:cs typeface="Segoe UI" pitchFamily="34" charset="-120"/>
               </a:rPr>
-              <a:t>Microsoft Confidential  ·  Foundry pattern catalog  ·  subject to change</a:t>
+              <a:t>Foundry pattern library  ·  subject to change</a:t>
             </a:r>
             <a:endParaRPr kumimoji="0" lang="en-US" sz="900" b="0" i="0" u="none" strike="noStrike" kern="1200" cap="none" spc="0" normalizeH="0" baseline="0" noProof="0" dirty="0">
               <a:ln>
@@ -30334,7 +30334,7 @@
                 <a:ea typeface="Segoe UI" pitchFamily="34" charset="-122"/>
                 <a:cs typeface="Segoe UI" pitchFamily="34" charset="-120"/>
               </a:rPr>
-              <a:t>Microsoft Confidential  ·  Foundry pattern catalog  ·  subject to change</a:t>
+              <a:t>Foundry pattern library  ·  subject to change</a:t>
             </a:r>
             <a:endParaRPr kumimoji="0" lang="en-US" sz="900" b="0" i="0" u="none" strike="noStrike" kern="1200" cap="none" spc="0" normalizeH="0" baseline="0" noProof="0" dirty="0">
               <a:ln>
@@ -31727,7 +31727,7 @@
                 <a:ea typeface="Segoe UI" pitchFamily="34" charset="-122"/>
                 <a:cs typeface="Segoe UI" pitchFamily="34" charset="-120"/>
               </a:rPr>
-              <a:t>Microsoft Confidential  ·  Foundry pattern catalog  ·  subject to change</a:t>
+              <a:t>Foundry pattern library  ·  subject to change</a:t>
             </a:r>
             <a:endParaRPr kumimoji="0" lang="en-US" sz="900" b="0" i="0" u="none" strike="noStrike" kern="1200" cap="none" spc="0" normalizeH="0" baseline="0" noProof="0" dirty="0">
               <a:ln>
@@ -34744,7 +34744,7 @@
                 <a:ea typeface="Segoe UI" pitchFamily="34" charset="-122"/>
                 <a:cs typeface="Segoe UI" pitchFamily="34" charset="-120"/>
               </a:rPr>
-              <a:t>Microsoft Confidential  ·  Foundry pattern catalog  ·  subject to change</a:t>
+              <a:t>Foundry pattern library  ·  subject to change</a:t>
             </a:r>
             <a:endParaRPr kumimoji="0" lang="en-US" sz="900" b="0" i="0" u="none" strike="noStrike" kern="1200" cap="none" spc="0" normalizeH="0" baseline="0" noProof="0" dirty="0">
               <a:ln>
@@ -35746,7 +35746,7 @@
                 <a:ea typeface="Segoe UI" pitchFamily="34" charset="-122"/>
                 <a:cs typeface="Segoe UI" pitchFamily="34" charset="-120"/>
               </a:rPr>
-              <a:t>Classified as Microsoft Confidential</a:t>
+              <a:t/>
             </a:r>
             <a:endParaRPr kumimoji="0" lang="en-US" sz="900" b="0" i="0" u="none" strike="noStrike" kern="1200" cap="none" spc="0" normalizeH="0" baseline="0" noProof="0" dirty="0">
               <a:ln>
@@ -39133,7 +39133,7 @@
                 <a:ea typeface="Segoe UI" pitchFamily="34" charset="-122"/>
                 <a:cs typeface="Segoe UI" pitchFamily="34" charset="-120"/>
               </a:rPr>
-              <a:t>Microsoft Confidential  ·  Foundry pattern catalog  ·  subject to change</a:t>
+              <a:t>Foundry pattern library  ·  subject to change</a:t>
             </a:r>
             <a:endParaRPr kumimoji="0" lang="en-US" sz="900" b="0" i="0" u="none" strike="noStrike" kern="1200" cap="none" spc="0" normalizeH="0" baseline="0" noProof="0" dirty="0">
               <a:ln>
@@ -40035,7 +40035,7 @@
                 <a:ea typeface="Segoe UI" pitchFamily="34" charset="-122"/>
                 <a:cs typeface="Segoe UI" pitchFamily="34" charset="-120"/>
               </a:rPr>
-              <a:t>Classified as Microsoft Confidential</a:t>
+              <a:t/>
             </a:r>
             <a:endParaRPr kumimoji="0" lang="en-US" sz="900" b="0" i="0" u="none" strike="noStrike" kern="1200" cap="none" spc="0" normalizeH="0" baseline="0" noProof="0" dirty="0">
               <a:ln>
@@ -42769,7 +42769,7 @@
                 <a:ea typeface="Segoe UI" pitchFamily="34" charset="-122"/>
                 <a:cs typeface="Segoe UI" pitchFamily="34" charset="-120"/>
               </a:rPr>
-              <a:t>Microsoft Confidential  ·  Foundry pattern catalog  ·  subject to change</a:t>
+              <a:t>Foundry pattern library  ·  subject to change</a:t>
             </a:r>
             <a:endParaRPr kumimoji="0" lang="en-US" sz="900" b="0" i="0" u="none" strike="noStrike" kern="1200" cap="none" spc="0" normalizeH="0" baseline="0" noProof="0" dirty="0">
               <a:ln>
@@ -45625,7 +45625,7 @@
                 <a:ea typeface="Segoe UI" pitchFamily="34" charset="-122"/>
                 <a:cs typeface="Segoe UI" pitchFamily="34" charset="-120"/>
               </a:rPr>
-              <a:t>Microsoft Confidential  ·  Foundry pattern catalog  ·  subject to change</a:t>
+              <a:t>Foundry pattern library  ·  subject to change</a:t>
             </a:r>
             <a:endParaRPr kumimoji="0" lang="en-US" sz="900" b="0" i="0" u="none" strike="noStrike" kern="1200" cap="none" spc="0" normalizeH="0" baseline="0" noProof="0" dirty="0">
               <a:ln>
@@ -46527,7 +46527,7 @@
                 <a:ea typeface="Segoe UI" pitchFamily="34" charset="-122"/>
                 <a:cs typeface="Segoe UI" pitchFamily="34" charset="-120"/>
               </a:rPr>
-              <a:t>Classified as Microsoft Confidential</a:t>
+              <a:t/>
             </a:r>
             <a:endParaRPr kumimoji="0" lang="en-US" sz="900" b="0" i="0" u="none" strike="noStrike" kern="1200" cap="none" spc="0" normalizeH="0" baseline="0" noProof="0" dirty="0">
               <a:ln>
@@ -49632,7 +49632,7 @@
                 <a:ea typeface="Segoe UI" pitchFamily="34" charset="-122"/>
                 <a:cs typeface="Segoe UI" pitchFamily="34" charset="-120"/>
               </a:rPr>
-              <a:t>Microsoft Confidential  ·  Foundry pattern catalog  ·  subject to change</a:t>
+              <a:t>Foundry pattern library  ·  subject to change</a:t>
             </a:r>
             <a:endParaRPr kumimoji="0" lang="en-US" sz="900" b="0" i="0" u="none" strike="noStrike" kern="1200" cap="none" spc="0" normalizeH="0" baseline="0" noProof="0" dirty="0">
               <a:ln>
@@ -52912,7 +52912,7 @@
                 <a:ea typeface="Segoe UI" pitchFamily="34" charset="-122"/>
                 <a:cs typeface="Segoe UI" pitchFamily="34" charset="-120"/>
               </a:rPr>
-              <a:t>Microsoft Confidential  ·  Foundry pattern catalog  ·  subject to change</a:t>
+              <a:t>Foundry pattern library  ·  subject to change</a:t>
             </a:r>
             <a:endParaRPr kumimoji="0" lang="en-US" sz="900" b="0" i="0" u="none" strike="noStrike" kern="1200" cap="none" spc="0" normalizeH="0" baseline="0" noProof="0" dirty="0">
               <a:ln>

--- a/foundry-patterns.pptx
+++ b/foundry-patterns.pptx
@@ -4281,7 +4281,7 @@
                 <a:ea typeface="Segoe UI Semilight" pitchFamily="34" charset="-122"/>
                 <a:cs typeface="Segoe UI Semilight" pitchFamily="34" charset="-120"/>
               </a:rPr>
-              <a:t>From AI Gateway to AI Factory</a:t>
+              <a:t>Microsoft Foundry Patterns</a:t>
             </a:r>
             <a:endParaRPr kumimoji="0" lang="en-US" sz="4600" b="0" i="0" u="none" strike="noStrike" kern="1200" cap="none" spc="0" normalizeH="0" baseline="0" noProof="0" dirty="0">
               <a:ln>
@@ -4353,7 +4353,7 @@
                 <a:ea typeface="Segoe UI" pitchFamily="34" charset="-122"/>
                 <a:cs typeface="Segoe UI" pitchFamily="34" charset="-120"/>
               </a:rPr>
-              <a:t>Thirteen Microsoft Foundry patterns — alongside your existing gateway and cloud</a:t>
+              <a:t>Runnable patterns for building, governing and operating agents</a:t>
             </a:r>
             <a:endParaRPr kumimoji="0" lang="en-US" sz="2000" b="0" i="0" u="none" strike="noStrike" kern="1200" cap="none" spc="0" normalizeH="0" baseline="0" noProof="0" dirty="0">
               <a:ln>
@@ -7911,7 +7911,7 @@
                 <a:ea typeface="Segoe UI" pitchFamily="34" charset="-122"/>
                 <a:cs typeface="Segoe UI" pitchFamily="34" charset="-120"/>
               </a:rPr>
-              <a:t>Foundry pattern library  ·  subject to change</a:t>
+              <a:t>Microsoft Foundry Patterns  ·  subject to change</a:t>
             </a:r>
             <a:endParaRPr kumimoji="0" lang="en-US" sz="900" b="0" i="0" u="none" strike="noStrike" kern="1200" cap="none" spc="0" normalizeH="0" baseline="0" noProof="0" dirty="0">
               <a:ln>
@@ -10820,7 +10820,7 @@
                 <a:ea typeface="Segoe UI" pitchFamily="34" charset="-122"/>
                 <a:cs typeface="Segoe UI" pitchFamily="34" charset="-120"/>
               </a:rPr>
-              <a:t>Foundry pattern library  ·  subject to change</a:t>
+              <a:t>Microsoft Foundry Patterns  ·  subject to change</a:t>
             </a:r>
             <a:endParaRPr kumimoji="0" lang="en-US" sz="900" b="0" i="0" u="none" strike="noStrike" kern="1200" cap="none" spc="0" normalizeH="0" baseline="0" noProof="0" dirty="0">
               <a:ln>
@@ -13899,7 +13899,7 @@
                 <a:ea typeface="Segoe UI" pitchFamily="34" charset="-122"/>
                 <a:cs typeface="Segoe UI" pitchFamily="34" charset="-120"/>
               </a:rPr>
-              <a:t>Foundry pattern library  ·  subject to change</a:t>
+              <a:t>Microsoft Foundry Patterns  ·  subject to change</a:t>
             </a:r>
             <a:endParaRPr kumimoji="0" lang="en-US" sz="900" b="0" i="0" u="none" strike="noStrike" kern="1200" cap="none" spc="0" normalizeH="0" baseline="0" noProof="0" dirty="0">
               <a:ln>
@@ -17325,7 +17325,7 @@
                 <a:ea typeface="Segoe UI" pitchFamily="34" charset="-122"/>
                 <a:cs typeface="Segoe UI" pitchFamily="34" charset="-120"/>
               </a:rPr>
-              <a:t>Foundry pattern library  ·  subject to change</a:t>
+              <a:t>Microsoft Foundry Patterns  ·  subject to change</a:t>
             </a:r>
             <a:endParaRPr kumimoji="0" lang="en-US" sz="900" b="0" i="0" u="none" strike="noStrike" kern="1200" cap="none" spc="0" normalizeH="0" baseline="0" noProof="0" dirty="0">
               <a:ln>
@@ -20126,7 +20126,7 @@
                 <a:ea typeface="Segoe UI" pitchFamily="34" charset="-122"/>
                 <a:cs typeface="Segoe UI" pitchFamily="34" charset="-120"/>
               </a:rPr>
-              <a:t>Foundry pattern library  ·  subject to change</a:t>
+              <a:t>Microsoft Foundry Patterns  ·  subject to change</a:t>
             </a:r>
             <a:endParaRPr kumimoji="0" lang="en-US" sz="900" b="0" i="0" u="none" strike="noStrike" kern="1200" cap="none" spc="0" normalizeH="0" baseline="0" noProof="0" dirty="0">
               <a:ln>
@@ -24400,7 +24400,7 @@
                 <a:ea typeface="Segoe UI" pitchFamily="34" charset="-122"/>
                 <a:cs typeface="Segoe UI" pitchFamily="34" charset="-120"/>
               </a:rPr>
-              <a:t>Foundry pattern library  ·  subject to change</a:t>
+              <a:t>Microsoft Foundry Patterns  ·  subject to change</a:t>
             </a:r>
             <a:endParaRPr kumimoji="0" lang="en-US" sz="900" b="0" i="0" u="none" strike="noStrike" kern="1200" cap="none" spc="0" normalizeH="0" baseline="0" noProof="0" dirty="0">
               <a:ln>
@@ -27367,7 +27367,7 @@
                 <a:ea typeface="Segoe UI" pitchFamily="34" charset="-122"/>
                 <a:cs typeface="Segoe UI" pitchFamily="34" charset="-120"/>
               </a:rPr>
-              <a:t>Foundry pattern library  ·  subject to change</a:t>
+              <a:t>Microsoft Foundry Patterns  ·  subject to change</a:t>
             </a:r>
             <a:endParaRPr kumimoji="0" lang="en-US" sz="900" b="0" i="0" u="none" strike="noStrike" kern="1200" cap="none" spc="0" normalizeH="0" baseline="0" noProof="0" dirty="0">
               <a:ln>
@@ -30334,7 +30334,7 @@
                 <a:ea typeface="Segoe UI" pitchFamily="34" charset="-122"/>
                 <a:cs typeface="Segoe UI" pitchFamily="34" charset="-120"/>
               </a:rPr>
-              <a:t>Foundry pattern library  ·  subject to change</a:t>
+              <a:t>Microsoft Foundry Patterns  ·  subject to change</a:t>
             </a:r>
             <a:endParaRPr kumimoji="0" lang="en-US" sz="900" b="0" i="0" u="none" strike="noStrike" kern="1200" cap="none" spc="0" normalizeH="0" baseline="0" noProof="0" dirty="0">
               <a:ln>
@@ -31727,7 +31727,7 @@
                 <a:ea typeface="Segoe UI" pitchFamily="34" charset="-122"/>
                 <a:cs typeface="Segoe UI" pitchFamily="34" charset="-120"/>
               </a:rPr>
-              <a:t>Foundry pattern library  ·  subject to change</a:t>
+              <a:t>Microsoft Foundry Patterns  ·  subject to change</a:t>
             </a:r>
             <a:endParaRPr kumimoji="0" lang="en-US" sz="900" b="0" i="0" u="none" strike="noStrike" kern="1200" cap="none" spc="0" normalizeH="0" baseline="0" noProof="0" dirty="0">
               <a:ln>
@@ -34744,7 +34744,7 @@
                 <a:ea typeface="Segoe UI" pitchFamily="34" charset="-122"/>
                 <a:cs typeface="Segoe UI" pitchFamily="34" charset="-120"/>
               </a:rPr>
-              <a:t>Foundry pattern library  ·  subject to change</a:t>
+              <a:t>Microsoft Foundry Patterns  ·  subject to change</a:t>
             </a:r>
             <a:endParaRPr kumimoji="0" lang="en-US" sz="900" b="0" i="0" u="none" strike="noStrike" kern="1200" cap="none" spc="0" normalizeH="0" baseline="0" noProof="0" dirty="0">
               <a:ln>
@@ -39133,7 +39133,7 @@
                 <a:ea typeface="Segoe UI" pitchFamily="34" charset="-122"/>
                 <a:cs typeface="Segoe UI" pitchFamily="34" charset="-120"/>
               </a:rPr>
-              <a:t>Foundry pattern library  ·  subject to change</a:t>
+              <a:t>Microsoft Foundry Patterns  ·  subject to change</a:t>
             </a:r>
             <a:endParaRPr kumimoji="0" lang="en-US" sz="900" b="0" i="0" u="none" strike="noStrike" kern="1200" cap="none" spc="0" normalizeH="0" baseline="0" noProof="0" dirty="0">
               <a:ln>
@@ -42769,7 +42769,7 @@
                 <a:ea typeface="Segoe UI" pitchFamily="34" charset="-122"/>
                 <a:cs typeface="Segoe UI" pitchFamily="34" charset="-120"/>
               </a:rPr>
-              <a:t>Foundry pattern library  ·  subject to change</a:t>
+              <a:t>Microsoft Foundry Patterns  ·  subject to change</a:t>
             </a:r>
             <a:endParaRPr kumimoji="0" lang="en-US" sz="900" b="0" i="0" u="none" strike="noStrike" kern="1200" cap="none" spc="0" normalizeH="0" baseline="0" noProof="0" dirty="0">
               <a:ln>
@@ -45625,7 +45625,7 @@
                 <a:ea typeface="Segoe UI" pitchFamily="34" charset="-122"/>
                 <a:cs typeface="Segoe UI" pitchFamily="34" charset="-120"/>
               </a:rPr>
-              <a:t>Foundry pattern library  ·  subject to change</a:t>
+              <a:t>Microsoft Foundry Patterns  ·  subject to change</a:t>
             </a:r>
             <a:endParaRPr kumimoji="0" lang="en-US" sz="900" b="0" i="0" u="none" strike="noStrike" kern="1200" cap="none" spc="0" normalizeH="0" baseline="0" noProof="0" dirty="0">
               <a:ln>
@@ -49632,7 +49632,7 @@
                 <a:ea typeface="Segoe UI" pitchFamily="34" charset="-122"/>
                 <a:cs typeface="Segoe UI" pitchFamily="34" charset="-120"/>
               </a:rPr>
-              <a:t>Foundry pattern library  ·  subject to change</a:t>
+              <a:t>Microsoft Foundry Patterns  ·  subject to change</a:t>
             </a:r>
             <a:endParaRPr kumimoji="0" lang="en-US" sz="900" b="0" i="0" u="none" strike="noStrike" kern="1200" cap="none" spc="0" normalizeH="0" baseline="0" noProof="0" dirty="0">
               <a:ln>
@@ -52912,7 +52912,7 @@
                 <a:ea typeface="Segoe UI" pitchFamily="34" charset="-122"/>
                 <a:cs typeface="Segoe UI" pitchFamily="34" charset="-120"/>
               </a:rPr>
-              <a:t>Foundry pattern library  ·  subject to change</a:t>
+              <a:t>Microsoft Foundry Patterns  ·  subject to change</a:t>
             </a:r>
             <a:endParaRPr kumimoji="0" lang="en-US" sz="900" b="0" i="0" u="none" strike="noStrike" kern="1200" cap="none" spc="0" normalizeH="0" baseline="0" noProof="0" dirty="0">
               <a:ln>

--- a/foundry-patterns.pptx
+++ b/foundry-patterns.pptx
@@ -4425,7 +4425,7 @@
                 <a:ea typeface="Segoe UI" pitchFamily="34" charset="-122"/>
                 <a:cs typeface="Segoe UI" pitchFamily="34" charset="-120"/>
               </a:rPr>
-              <a:t>A Private Banking scenario</a:t>
+              <a:t/>
             </a:r>
             <a:r>
               <a:rPr kumimoji="0" lang="en-US" sz="1500" b="0" i="0" u="none" strike="noStrike" kern="1200" cap="none" spc="0" normalizeH="0" baseline="0" noProof="0" dirty="0">
@@ -4442,7 +4442,7 @@
                 <a:ea typeface="Segoe UI" pitchFamily="34" charset="-122"/>
                 <a:cs typeface="Segoe UI" pitchFamily="34" charset="-120"/>
               </a:rPr>
-              <a:t>      ·      </a:t>
+              <a:t/>
             </a:r>
             <a:r>
               <a:rPr kumimoji="0" lang="en-US" sz="1500" b="1" i="0" u="none" strike="noStrike" kern="1200" cap="none" spc="0" normalizeH="0" baseline="0" noProof="0" dirty="0">

--- a/foundry-patterns.pptx
+++ b/foundry-patterns.pptx
@@ -27,7 +27,6 @@
     <p:sldId id="264" r:id="rId18"/>
     <p:sldId id="265" r:id="rId19"/>
     <p:sldId id="269" r:id="rId20"/>
-    <p:sldId id="270" r:id="rId21"/>
     <p:sldId id="271" r:id="rId22"/>
   </p:sldIdLst>
   <p:sldSz cx="12192000" cy="6858000"/>
@@ -2177,150 +2176,6 @@
                 <a:defRPr/>
               </a:pPr>
               <a:t>2</a:t>
-            </a:fld>
-            <a:endParaRPr kumimoji="0" lang="en-US" sz="1800" b="0" i="0" u="none" strike="noStrike" kern="1200" cap="none" spc="0" normalizeH="0" baseline="0" noProof="0">
-              <a:ln>
-                <a:noFill/>
-              </a:ln>
-              <a:solidFill>
-                <a:prstClr val="black"/>
-              </a:solidFill>
-              <a:effectLst/>
-              <a:uLnTx/>
-              <a:uFillTx/>
-              <a:latin typeface="Aptos" panose="02110004020202020204"/>
-              <a:ea typeface="+mn-ea"/>
-              <a:cs typeface="+mn-cs"/>
-            </a:endParaRPr>
-          </a:p>
-        </p:txBody>
-      </p:sp>
-    </p:spTree>
-    <p:extLst>
-      <p:ext uri="{BB962C8B-B14F-4D97-AF65-F5344CB8AC3E}">
-        <p14:creationId xmlns:p14="http://schemas.microsoft.com/office/powerpoint/2010/main" val="1024086991"/>
-      </p:ext>
-    </p:extLst>
-  </p:cSld>
-  <p:clrMapOvr>
-    <a:masterClrMapping/>
-  </p:clrMapOvr>
-</p:notes>
-</file>
-
-<file path=ppt/notesSlides/notesSlide20.xml><?xml version="1.0" encoding="utf-8"?>
-<p:notes xmlns:a="http://schemas.openxmlformats.org/drawingml/2006/main" xmlns:r="http://schemas.openxmlformats.org/officeDocument/2006/relationships" xmlns:p="http://schemas.openxmlformats.org/presentationml/2006/main">
-  <p:cSld>
-    <p:spTree>
-      <p:nvGrpSpPr>
-        <p:cNvPr id="1" name=""/>
-        <p:cNvGrpSpPr/>
-        <p:nvPr/>
-      </p:nvGrpSpPr>
-      <p:grpSpPr>
-        <a:xfrm>
-          <a:off x="0" y="0"/>
-          <a:ext cx="0" cy="0"/>
-          <a:chOff x="0" y="0"/>
-          <a:chExt cx="0" cy="0"/>
-        </a:xfrm>
-      </p:grpSpPr>
-      <p:sp>
-        <p:nvSpPr>
-          <p:cNvPr id="2" name="Slide Image Placeholder 1"/>
-          <p:cNvSpPr>
-            <a:spLocks noGrp="1" noRot="1" noChangeAspect="1"/>
-          </p:cNvSpPr>
-          <p:nvPr>
-            <p:ph type="sldImg"/>
-          </p:nvPr>
-        </p:nvSpPr>
-        <p:spPr/>
-      </p:sp>
-      <p:sp>
-        <p:nvSpPr>
-          <p:cNvPr id="3" name="Notes Placeholder 2"/>
-          <p:cNvSpPr>
-            <a:spLocks noGrp="1"/>
-          </p:cNvSpPr>
-          <p:nvPr>
-            <p:ph type="body" idx="1"/>
-          </p:nvPr>
-        </p:nvSpPr>
-        <p:spPr/>
-        <p:txBody>
-          <a:bodyPr/>
-          <a:lstStyle/>
-          <a:p>
-            <a:endParaRPr lang="en-US" dirty="0"/>
-          </a:p>
-        </p:txBody>
-      </p:sp>
-      <p:sp>
-        <p:nvSpPr>
-          <p:cNvPr id="4" name="Slide Number Placeholder 3"/>
-          <p:cNvSpPr>
-            <a:spLocks noGrp="1"/>
-          </p:cNvSpPr>
-          <p:nvPr>
-            <p:ph type="sldNum" sz="quarter" idx="10"/>
-          </p:nvPr>
-        </p:nvSpPr>
-        <p:spPr/>
-        <p:txBody>
-          <a:bodyPr/>
-          <a:lstStyle/>
-          <a:p>
-            <a:pPr marL="0" marR="0" lvl="0" indent="0" algn="l" defTabSz="914400" rtl="0" eaLnBrk="1" fontAlgn="auto" latinLnBrk="0" hangingPunct="1">
-              <a:lnSpc>
-                <a:spcPct val="100000"/>
-              </a:lnSpc>
-              <a:spcBef>
-                <a:spcPts val="0"/>
-              </a:spcBef>
-              <a:spcAft>
-                <a:spcPts val="0"/>
-              </a:spcAft>
-              <a:buClrTx/>
-              <a:buSzTx/>
-              <a:buFontTx/>
-              <a:buNone/>
-              <a:tabLst/>
-              <a:defRPr/>
-            </a:pPr>
-            <a:fld id="{F7021451-1387-4CA6-816F-3879F97B5CBC}" type="slidenum">
-              <a:rPr kumimoji="0" lang="en-US" sz="1800" b="0" i="0" u="none" strike="noStrike" kern="1200" cap="none" spc="0" normalizeH="0" baseline="0" noProof="0">
-                <a:ln>
-                  <a:noFill/>
-                </a:ln>
-                <a:solidFill>
-                  <a:prstClr val="black"/>
-                </a:solidFill>
-                <a:effectLst/>
-                <a:uLnTx/>
-                <a:uFillTx/>
-                <a:latin typeface="Aptos" panose="02110004020202020204"/>
-                <a:ea typeface="+mn-ea"/>
-                <a:cs typeface="+mn-cs"/>
-              </a:rPr>
-              <a:pPr marL="0" marR="0" lvl="0" indent="0" algn="l" defTabSz="914400" rtl="0" eaLnBrk="1" fontAlgn="auto" latinLnBrk="0" hangingPunct="1">
-                <a:lnSpc>
-                  <a:spcPct val="100000"/>
-                </a:lnSpc>
-                <a:spcBef>
-                  <a:spcPts val="0"/>
-                </a:spcBef>
-                <a:spcAft>
-                  <a:spcPts val="0"/>
-                </a:spcAft>
-                <a:buClrTx/>
-                <a:buSzTx/>
-                <a:buFontTx/>
-                <a:buNone/>
-                <a:tabLst/>
-                <a:defRPr/>
-              </a:pPr>
-              <a:t>20</a:t>
             </a:fld>
             <a:endParaRPr kumimoji="0" lang="en-US" sz="1800" b="0" i="0" u="none" strike="noStrike" kern="1200" cap="none" spc="0" normalizeH="0" baseline="0" noProof="0">
               <a:ln>
@@ -4659,7 +4514,7 @@
                 <a:ea typeface="Segoe UI" pitchFamily="34" charset="-122"/>
                 <a:cs typeface="Segoe UI" pitchFamily="34" charset="-120"/>
               </a:rPr>
-              <a:t>13 patterns   ·   13 demos   ·   for architects &amp; principal engineers</a:t>
+              <a:t>12 patterns   ·   12 demos   ·   for architects &amp; principal engineers</a:t>
             </a:r>
             <a:endParaRPr kumimoji="0" lang="en-US" sz="1250" b="0" i="0" u="none" strike="noStrike" kern="1200" cap="none" spc="0" normalizeH="0" baseline="0" noProof="0" dirty="0">
               <a:ln>
@@ -5300,7 +5155,7 @@
                 <a:ea typeface="Segoe UI Semibold" pitchFamily="34" charset="-122"/>
                 <a:cs typeface="Segoe UI Semibold" pitchFamily="34" charset="-120"/>
               </a:rPr>
-              <a:t>Centralized Toolboxes</a:t>
+              <a:t>Centralized Toolboxes (one governed MCP endpoint)</a:t>
             </a:r>
             <a:endParaRPr kumimoji="0" lang="en-US" sz="2500" b="0" i="0" u="none" strike="noStrike" kern="1200" cap="none" spc="0" normalizeH="0" baseline="0" noProof="0" dirty="0">
               <a:ln>
@@ -8557,7 +8412,7 @@
                 <a:ea typeface="Segoe UI Semibold" pitchFamily="34" charset="-122"/>
                 <a:cs typeface="Segoe UI Semibold" pitchFamily="34" charset="-120"/>
               </a:rPr>
-              <a:t>Agentic Loop — Build Skills, Not Agents</a:t>
+              <a:t>Agentic Loop (build skills, not agents)</a:t>
             </a:r>
             <a:endParaRPr kumimoji="0" lang="en-US" sz="2500" b="0" i="0" u="none" strike="noStrike" kern="1200" cap="none" spc="0" normalizeH="0" baseline="0" noProof="0" dirty="0">
               <a:ln>
@@ -11461,7 +11316,7 @@
                 <a:ea typeface="Segoe UI Semibold" pitchFamily="34" charset="-122"/>
                 <a:cs typeface="Segoe UI Semibold" pitchFamily="34" charset="-120"/>
               </a:rPr>
-              <a:t>Memory — agents that remember the client</a:t>
+              <a:t>Memory (short-term + long-term)</a:t>
             </a:r>
             <a:endParaRPr kumimoji="0" lang="en-US" sz="2500" b="0" i="0" u="none" strike="noStrike" kern="1200" cap="none" spc="0" normalizeH="0" baseline="0" noProof="0" dirty="0">
               <a:ln>
@@ -15375,7 +15230,7 @@
                 <a:ea typeface="Segoe UI Semibold" pitchFamily="34" charset="-122"/>
                 <a:cs typeface="Segoe UI Semibold" pitchFamily="34" charset="-120"/>
               </a:rPr>
-              <a:t>Multi-agent Orchestration (Agent Framework)</a:t>
+              <a:t>Multi-agent orchestration (Agent Framework)</a:t>
             </a:r>
             <a:endParaRPr kumimoji="0" lang="en-US" sz="2500" b="0" i="0" u="none" strike="noStrike" kern="1200" cap="none" spc="0" normalizeH="0" baseline="0" noProof="0" dirty="0">
               <a:ln>
@@ -17966,7 +17821,7 @@
                 <a:ea typeface="Segoe UI Semibold" pitchFamily="34" charset="-122"/>
                 <a:cs typeface="Segoe UI Semibold" pitchFamily="34" charset="-120"/>
               </a:rPr>
-              <a:t>Cross-cloud Interop — bring your other cloud</a:t>
+              <a:t>Cross-cloud interop (MCP / A2A)</a:t>
             </a:r>
             <a:endParaRPr kumimoji="0" lang="en-US" sz="2500" b="0" i="0" u="none" strike="noStrike" kern="1200" cap="none" spc="0" normalizeH="0" baseline="0" noProof="0" dirty="0">
               <a:ln>
@@ -20824,7 +20679,7 @@
                 <a:ea typeface="Segoe UI" pitchFamily="34" charset="-122"/>
                 <a:cs typeface="Segoe UI" pitchFamily="34" charset="-120"/>
               </a:rPr>
-              <a:t>06  Observability   ·   07  Evaluation   ·   11  Caching &amp; Cost   ·   12  Agent 365 &amp; ROI</a:t>
+              <a:t>06  Observability   ·   07  Evaluation   ·   11  Cost &amp; latency</a:t>
             </a:r>
             <a:endParaRPr kumimoji="0" lang="en-US" sz="1500" b="0" i="0" u="none" strike="noStrike" kern="1200" cap="none" spc="0" normalizeH="0" baseline="0" noProof="0" dirty="0">
               <a:ln>
@@ -21602,7 +21457,7 @@
                 <a:ea typeface="Segoe UI Semibold" pitchFamily="34" charset="-122"/>
                 <a:cs typeface="Segoe UI Semibold" pitchFamily="34" charset="-120"/>
               </a:rPr>
-              <a:t>Observability &amp; Tracing</a:t>
+              <a:t>Observability &amp; tracing (OpenTelemetry)</a:t>
             </a:r>
             <a:endParaRPr kumimoji="0" lang="en-US" sz="2500" b="0" i="0" u="none" strike="noStrike" kern="1200" cap="none" spc="0" normalizeH="0" baseline="0" noProof="0" dirty="0">
               <a:ln>
@@ -25041,7 +24896,7 @@
                 <a:ea typeface="Segoe UI Semibold" pitchFamily="34" charset="-122"/>
                 <a:cs typeface="Segoe UI Semibold" pitchFamily="34" charset="-120"/>
               </a:rPr>
-              <a:t>Evaluation → Optimization</a:t>
+              <a:t>Evaluation → optimization (CI gate)</a:t>
             </a:r>
             <a:endParaRPr kumimoji="0" lang="en-US" sz="2500" b="0" i="0" u="none" strike="noStrike" kern="1200" cap="none" spc="0" normalizeH="0" baseline="0" noProof="0" dirty="0">
               <a:ln>
@@ -28008,7 +27863,7 @@
                 <a:ea typeface="Segoe UI Semibold" pitchFamily="34" charset="-122"/>
                 <a:cs typeface="Segoe UI Semibold" pitchFamily="34" charset="-120"/>
               </a:rPr>
-              <a:t>Caching &amp; Cost — prompt cache + Model Router</a:t>
+              <a:t>Cost &amp; latency (prompt cache + Model Router)</a:t>
             </a:r>
             <a:endParaRPr kumimoji="0" lang="en-US" sz="2500" b="0" i="0" u="none" strike="noStrike" kern="1200" cap="none" spc="0" normalizeH="0" baseline="0" noProof="0" dirty="0">
               <a:ln>
@@ -31800,3023 +31655,6 @@
                 <a:cs typeface="Segoe UI" pitchFamily="34" charset="-120"/>
               </a:rPr>
               <a:t>2</a:t>
-            </a:r>
-            <a:endParaRPr kumimoji="0" lang="en-US" sz="900" b="0" i="0" u="none" strike="noStrike" kern="1200" cap="none" spc="0" normalizeH="0" baseline="0" noProof="0" dirty="0">
-              <a:ln>
-                <a:noFill/>
-              </a:ln>
-              <a:solidFill>
-                <a:prstClr val="black"/>
-              </a:solidFill>
-              <a:effectLst/>
-              <a:uLnTx/>
-              <a:uFillTx/>
-              <a:latin typeface="Calibri" panose="020F0502020204030204"/>
-              <a:ea typeface="+mn-ea"/>
-              <a:cs typeface="+mn-cs"/>
-            </a:endParaRPr>
-          </a:p>
-        </p:txBody>
-      </p:sp>
-    </p:spTree>
-  </p:cSld>
-  <p:clrMapOvr>
-    <a:masterClrMapping/>
-  </p:clrMapOvr>
-</p:sld>
-</file>
-
-<file path=ppt/slides/slide20.xml><?xml version="1.0" encoding="utf-8"?>
-<p:sld xmlns:a="http://schemas.openxmlformats.org/drawingml/2006/main" xmlns:r="http://schemas.openxmlformats.org/officeDocument/2006/relationships" xmlns:p="http://schemas.openxmlformats.org/presentationml/2006/main">
-  <p:cSld>
-    <p:bg>
-      <p:bgPr>
-        <a:solidFill>
-          <a:srgbClr val="FFFFFF"/>
-        </a:solidFill>
-        <a:effectLst/>
-      </p:bgPr>
-    </p:bg>
-    <p:spTree>
-      <p:nvGrpSpPr>
-        <p:cNvPr id="1" name=""/>
-        <p:cNvGrpSpPr/>
-        <p:nvPr/>
-      </p:nvGrpSpPr>
-      <p:grpSpPr>
-        <a:xfrm>
-          <a:off x="0" y="0"/>
-          <a:ext cx="0" cy="0"/>
-          <a:chOff x="0" y="0"/>
-          <a:chExt cx="0" cy="0"/>
-        </a:xfrm>
-      </p:grpSpPr>
-      <p:sp>
-        <p:nvSpPr>
-          <p:cNvPr id="2" name="Shape 0"/>
-          <p:cNvSpPr/>
-          <p:nvPr/>
-        </p:nvSpPr>
-        <p:spPr>
-          <a:xfrm>
-            <a:off x="9948672" y="384048"/>
-            <a:ext cx="102047" cy="102047"/>
-          </a:xfrm>
-          <a:prstGeom prst="rect">
-            <a:avLst/>
-          </a:prstGeom>
-          <a:solidFill>
-            <a:srgbClr val="F25022"/>
-          </a:solidFill>
-          <a:ln w="6350">
-            <a:solidFill>
-              <a:srgbClr val="F25022"/>
-            </a:solidFill>
-            <a:prstDash val="solid"/>
-          </a:ln>
-        </p:spPr>
-        <p:txBody>
-          <a:bodyPr/>
-          <a:lstStyle/>
-          <a:p>
-            <a:pPr marL="0" marR="0" lvl="0" indent="0" algn="l" defTabSz="914400" rtl="0" eaLnBrk="1" fontAlgn="auto" latinLnBrk="0" hangingPunct="1">
-              <a:lnSpc>
-                <a:spcPct val="100000"/>
-              </a:lnSpc>
-              <a:spcBef>
-                <a:spcPts val="0"/>
-              </a:spcBef>
-              <a:spcAft>
-                <a:spcPts val="0"/>
-              </a:spcAft>
-              <a:buClrTx/>
-              <a:buSzTx/>
-              <a:buFontTx/>
-              <a:buNone/>
-              <a:tabLst/>
-              <a:defRPr/>
-            </a:pPr>
-            <a:endParaRPr kumimoji="0" lang="en-ZA" sz="1800" b="0" i="0" u="none" strike="noStrike" kern="1200" cap="none" spc="0" normalizeH="0" baseline="0" noProof="0">
-              <a:ln>
-                <a:noFill/>
-              </a:ln>
-              <a:solidFill>
-                <a:prstClr val="black"/>
-              </a:solidFill>
-              <a:effectLst/>
-              <a:uLnTx/>
-              <a:uFillTx/>
-              <a:latin typeface="Calibri" panose="020F0502020204030204"/>
-              <a:ea typeface="+mn-ea"/>
-              <a:cs typeface="+mn-cs"/>
-            </a:endParaRPr>
-          </a:p>
-        </p:txBody>
-      </p:sp>
-      <p:sp>
-        <p:nvSpPr>
-          <p:cNvPr id="3" name="Shape 1"/>
-          <p:cNvSpPr/>
-          <p:nvPr/>
-        </p:nvSpPr>
-        <p:spPr>
-          <a:xfrm>
-            <a:off x="10066081" y="384048"/>
-            <a:ext cx="102047" cy="102047"/>
-          </a:xfrm>
-          <a:prstGeom prst="rect">
-            <a:avLst/>
-          </a:prstGeom>
-          <a:solidFill>
-            <a:srgbClr val="7FBA00"/>
-          </a:solidFill>
-          <a:ln w="6350">
-            <a:solidFill>
-              <a:srgbClr val="7FBA00"/>
-            </a:solidFill>
-            <a:prstDash val="solid"/>
-          </a:ln>
-        </p:spPr>
-        <p:txBody>
-          <a:bodyPr/>
-          <a:lstStyle/>
-          <a:p>
-            <a:pPr marL="0" marR="0" lvl="0" indent="0" algn="l" defTabSz="914400" rtl="0" eaLnBrk="1" fontAlgn="auto" latinLnBrk="0" hangingPunct="1">
-              <a:lnSpc>
-                <a:spcPct val="100000"/>
-              </a:lnSpc>
-              <a:spcBef>
-                <a:spcPts val="0"/>
-              </a:spcBef>
-              <a:spcAft>
-                <a:spcPts val="0"/>
-              </a:spcAft>
-              <a:buClrTx/>
-              <a:buSzTx/>
-              <a:buFontTx/>
-              <a:buNone/>
-              <a:tabLst/>
-              <a:defRPr/>
-            </a:pPr>
-            <a:endParaRPr kumimoji="0" lang="en-ZA" sz="1800" b="0" i="0" u="none" strike="noStrike" kern="1200" cap="none" spc="0" normalizeH="0" baseline="0" noProof="0">
-              <a:ln>
-                <a:noFill/>
-              </a:ln>
-              <a:solidFill>
-                <a:prstClr val="black"/>
-              </a:solidFill>
-              <a:effectLst/>
-              <a:uLnTx/>
-              <a:uFillTx/>
-              <a:latin typeface="Calibri" panose="020F0502020204030204"/>
-              <a:ea typeface="+mn-ea"/>
-              <a:cs typeface="+mn-cs"/>
-            </a:endParaRPr>
-          </a:p>
-        </p:txBody>
-      </p:sp>
-      <p:sp>
-        <p:nvSpPr>
-          <p:cNvPr id="4" name="Shape 2"/>
-          <p:cNvSpPr/>
-          <p:nvPr/>
-        </p:nvSpPr>
-        <p:spPr>
-          <a:xfrm>
-            <a:off x="9948672" y="501457"/>
-            <a:ext cx="102047" cy="102047"/>
-          </a:xfrm>
-          <a:prstGeom prst="rect">
-            <a:avLst/>
-          </a:prstGeom>
-          <a:solidFill>
-            <a:srgbClr val="00A4EF"/>
-          </a:solidFill>
-          <a:ln w="6350">
-            <a:solidFill>
-              <a:srgbClr val="00A4EF"/>
-            </a:solidFill>
-            <a:prstDash val="solid"/>
-          </a:ln>
-        </p:spPr>
-        <p:txBody>
-          <a:bodyPr/>
-          <a:lstStyle/>
-          <a:p>
-            <a:pPr marL="0" marR="0" lvl="0" indent="0" algn="l" defTabSz="914400" rtl="0" eaLnBrk="1" fontAlgn="auto" latinLnBrk="0" hangingPunct="1">
-              <a:lnSpc>
-                <a:spcPct val="100000"/>
-              </a:lnSpc>
-              <a:spcBef>
-                <a:spcPts val="0"/>
-              </a:spcBef>
-              <a:spcAft>
-                <a:spcPts val="0"/>
-              </a:spcAft>
-              <a:buClrTx/>
-              <a:buSzTx/>
-              <a:buFontTx/>
-              <a:buNone/>
-              <a:tabLst/>
-              <a:defRPr/>
-            </a:pPr>
-            <a:endParaRPr kumimoji="0" lang="en-ZA" sz="1800" b="0" i="0" u="none" strike="noStrike" kern="1200" cap="none" spc="0" normalizeH="0" baseline="0" noProof="0">
-              <a:ln>
-                <a:noFill/>
-              </a:ln>
-              <a:solidFill>
-                <a:prstClr val="black"/>
-              </a:solidFill>
-              <a:effectLst/>
-              <a:uLnTx/>
-              <a:uFillTx/>
-              <a:latin typeface="Calibri" panose="020F0502020204030204"/>
-              <a:ea typeface="+mn-ea"/>
-              <a:cs typeface="+mn-cs"/>
-            </a:endParaRPr>
-          </a:p>
-        </p:txBody>
-      </p:sp>
-      <p:sp>
-        <p:nvSpPr>
-          <p:cNvPr id="5" name="Shape 3"/>
-          <p:cNvSpPr/>
-          <p:nvPr/>
-        </p:nvSpPr>
-        <p:spPr>
-          <a:xfrm>
-            <a:off x="10066081" y="501457"/>
-            <a:ext cx="102047" cy="102047"/>
-          </a:xfrm>
-          <a:prstGeom prst="rect">
-            <a:avLst/>
-          </a:prstGeom>
-          <a:solidFill>
-            <a:srgbClr val="FFB900"/>
-          </a:solidFill>
-          <a:ln w="6350">
-            <a:solidFill>
-              <a:srgbClr val="FFB900"/>
-            </a:solidFill>
-            <a:prstDash val="solid"/>
-          </a:ln>
-        </p:spPr>
-        <p:txBody>
-          <a:bodyPr/>
-          <a:lstStyle/>
-          <a:p>
-            <a:pPr marL="0" marR="0" lvl="0" indent="0" algn="l" defTabSz="914400" rtl="0" eaLnBrk="1" fontAlgn="auto" latinLnBrk="0" hangingPunct="1">
-              <a:lnSpc>
-                <a:spcPct val="100000"/>
-              </a:lnSpc>
-              <a:spcBef>
-                <a:spcPts val="0"/>
-              </a:spcBef>
-              <a:spcAft>
-                <a:spcPts val="0"/>
-              </a:spcAft>
-              <a:buClrTx/>
-              <a:buSzTx/>
-              <a:buFontTx/>
-              <a:buNone/>
-              <a:tabLst/>
-              <a:defRPr/>
-            </a:pPr>
-            <a:endParaRPr kumimoji="0" lang="en-ZA" sz="1800" b="0" i="0" u="none" strike="noStrike" kern="1200" cap="none" spc="0" normalizeH="0" baseline="0" noProof="0">
-              <a:ln>
-                <a:noFill/>
-              </a:ln>
-              <a:solidFill>
-                <a:prstClr val="black"/>
-              </a:solidFill>
-              <a:effectLst/>
-              <a:uLnTx/>
-              <a:uFillTx/>
-              <a:latin typeface="Calibri" panose="020F0502020204030204"/>
-              <a:ea typeface="+mn-ea"/>
-              <a:cs typeface="+mn-cs"/>
-            </a:endParaRPr>
-          </a:p>
-        </p:txBody>
-      </p:sp>
-      <p:sp>
-        <p:nvSpPr>
-          <p:cNvPr id="6" name="Text 4"/>
-          <p:cNvSpPr/>
-          <p:nvPr/>
-        </p:nvSpPr>
-        <p:spPr>
-          <a:xfrm>
-            <a:off x="10277856" y="329184"/>
-            <a:ext cx="4206240" cy="329184"/>
-          </a:xfrm>
-          <a:prstGeom prst="rect">
-            <a:avLst/>
-          </a:prstGeom>
-          <a:noFill/>
-          <a:ln/>
-        </p:spPr>
-        <p:txBody>
-          <a:bodyPr wrap="square" lIns="0" tIns="0" rIns="0" bIns="0" rtlCol="0" anchor="ctr"/>
-          <a:lstStyle/>
-          <a:p>
-            <a:pPr marL="0" marR="0" lvl="0" indent="0" algn="l" defTabSz="914400" rtl="0" eaLnBrk="1" fontAlgn="auto" latinLnBrk="0" hangingPunct="1">
-              <a:lnSpc>
-                <a:spcPct val="100000"/>
-              </a:lnSpc>
-              <a:spcBef>
-                <a:spcPts val="0"/>
-              </a:spcBef>
-              <a:spcAft>
-                <a:spcPts val="0"/>
-              </a:spcAft>
-              <a:buClrTx/>
-              <a:buSzTx/>
-              <a:buFontTx/>
-              <a:buNone/>
-              <a:tabLst/>
-              <a:defRPr/>
-            </a:pPr>
-            <a:r>
-              <a:rPr kumimoji="0" lang="en-US" sz="1100" b="0" i="0" u="none" strike="noStrike" kern="1200" cap="none" spc="0" normalizeH="0" baseline="0" noProof="0" dirty="0">
-                <a:ln>
-                  <a:noFill/>
-                </a:ln>
-                <a:solidFill>
-                  <a:srgbClr val="5B5B5B"/>
-                </a:solidFill>
-                <a:effectLst/>
-                <a:uLnTx/>
-                <a:uFillTx/>
-                <a:latin typeface="Segoe UI Semibold" pitchFamily="34" charset="0"/>
-                <a:ea typeface="Segoe UI Semibold" pitchFamily="34" charset="-122"/>
-                <a:cs typeface="Segoe UI Semibold" pitchFamily="34" charset="-120"/>
-              </a:rPr>
-              <a:t>Microsoft Foundry</a:t>
-            </a:r>
-            <a:endParaRPr kumimoji="0" lang="en-US" sz="1100" b="0" i="0" u="none" strike="noStrike" kern="1200" cap="none" spc="0" normalizeH="0" baseline="0" noProof="0" dirty="0">
-              <a:ln>
-                <a:noFill/>
-              </a:ln>
-              <a:solidFill>
-                <a:prstClr val="black"/>
-              </a:solidFill>
-              <a:effectLst/>
-              <a:uLnTx/>
-              <a:uFillTx/>
-              <a:latin typeface="Calibri" panose="020F0502020204030204"/>
-              <a:ea typeface="+mn-ea"/>
-              <a:cs typeface="+mn-cs"/>
-            </a:endParaRPr>
-          </a:p>
-        </p:txBody>
-      </p:sp>
-      <p:sp>
-        <p:nvSpPr>
-          <p:cNvPr id="7" name="Text 5"/>
-          <p:cNvSpPr/>
-          <p:nvPr/>
-        </p:nvSpPr>
-        <p:spPr>
-          <a:xfrm>
-            <a:off x="566928" y="256032"/>
-            <a:ext cx="1234440" cy="822960"/>
-          </a:xfrm>
-          <a:prstGeom prst="rect">
-            <a:avLst/>
-          </a:prstGeom>
-          <a:noFill/>
-          <a:ln/>
-        </p:spPr>
-        <p:txBody>
-          <a:bodyPr wrap="square" lIns="0" tIns="0" rIns="0" bIns="0" rtlCol="0" anchor="ctr"/>
-          <a:lstStyle/>
-          <a:p>
-            <a:pPr marL="0" marR="0" lvl="0" indent="0" algn="l" defTabSz="914400" rtl="0" eaLnBrk="1" fontAlgn="auto" latinLnBrk="0" hangingPunct="1">
-              <a:lnSpc>
-                <a:spcPct val="100000"/>
-              </a:lnSpc>
-              <a:spcBef>
-                <a:spcPts val="0"/>
-              </a:spcBef>
-              <a:spcAft>
-                <a:spcPts val="0"/>
-              </a:spcAft>
-              <a:buClrTx/>
-              <a:buSzTx/>
-              <a:buFontTx/>
-              <a:buNone/>
-              <a:tabLst/>
-              <a:defRPr/>
-            </a:pPr>
-            <a:r>
-              <a:rPr kumimoji="0" lang="en-US" sz="4600" b="1" i="0" u="none" strike="noStrike" kern="1200" cap="none" spc="0" normalizeH="0" baseline="0" noProof="0" dirty="0">
-                <a:ln>
-                  <a:noFill/>
-                </a:ln>
-                <a:solidFill>
-                  <a:srgbClr val="8661C5"/>
-                </a:solidFill>
-                <a:effectLst/>
-                <a:uLnTx/>
-                <a:uFillTx/>
-                <a:latin typeface="Segoe UI Semibold" pitchFamily="34" charset="0"/>
-                <a:ea typeface="Segoe UI Semibold" pitchFamily="34" charset="-122"/>
-                <a:cs typeface="Segoe UI Semibold" pitchFamily="34" charset="-120"/>
-              </a:rPr>
-              <a:t>12</a:t>
-            </a:r>
-            <a:endParaRPr kumimoji="0" lang="en-US" sz="4600" b="0" i="0" u="none" strike="noStrike" kern="1200" cap="none" spc="0" normalizeH="0" baseline="0" noProof="0" dirty="0">
-              <a:ln>
-                <a:noFill/>
-              </a:ln>
-              <a:solidFill>
-                <a:prstClr val="black"/>
-              </a:solidFill>
-              <a:effectLst/>
-              <a:uLnTx/>
-              <a:uFillTx/>
-              <a:latin typeface="Calibri" panose="020F0502020204030204"/>
-              <a:ea typeface="+mn-ea"/>
-              <a:cs typeface="+mn-cs"/>
-            </a:endParaRPr>
-          </a:p>
-        </p:txBody>
-      </p:sp>
-      <p:sp>
-        <p:nvSpPr>
-          <p:cNvPr id="8" name="Text 6"/>
-          <p:cNvSpPr/>
-          <p:nvPr/>
-        </p:nvSpPr>
-        <p:spPr>
-          <a:xfrm>
-            <a:off x="603504" y="1088136"/>
-            <a:ext cx="1371600" cy="219456"/>
-          </a:xfrm>
-          <a:prstGeom prst="rect">
-            <a:avLst/>
-          </a:prstGeom>
-          <a:noFill/>
-          <a:ln/>
-        </p:spPr>
-        <p:txBody>
-          <a:bodyPr wrap="square" lIns="0" tIns="0" rIns="0" bIns="0" rtlCol="0" anchor="ctr"/>
-          <a:lstStyle/>
-          <a:p>
-            <a:pPr marL="0" marR="0" lvl="0" indent="0" algn="l" defTabSz="914400" rtl="0" eaLnBrk="1" fontAlgn="auto" latinLnBrk="0" hangingPunct="1">
-              <a:lnSpc>
-                <a:spcPct val="100000"/>
-              </a:lnSpc>
-              <a:spcBef>
-                <a:spcPts val="0"/>
-              </a:spcBef>
-              <a:spcAft>
-                <a:spcPts val="0"/>
-              </a:spcAft>
-              <a:buClrTx/>
-              <a:buSzTx/>
-              <a:buFontTx/>
-              <a:buNone/>
-              <a:tabLst/>
-              <a:defRPr/>
-            </a:pPr>
-            <a:r>
-              <a:rPr kumimoji="0" lang="en-US" sz="900" b="1" i="0" u="none" strike="noStrike" kern="0" cap="none" spc="200" normalizeH="0" baseline="0" noProof="0" dirty="0">
-                <a:ln>
-                  <a:noFill/>
-                </a:ln>
-                <a:solidFill>
-                  <a:srgbClr val="605E5C"/>
-                </a:solidFill>
-                <a:effectLst/>
-                <a:uLnTx/>
-                <a:uFillTx/>
-                <a:latin typeface="Segoe UI Semibold" pitchFamily="34" charset="0"/>
-                <a:ea typeface="Segoe UI Semibold" pitchFamily="34" charset="-122"/>
-                <a:cs typeface="Segoe UI Semibold" pitchFamily="34" charset="-120"/>
-              </a:rPr>
-              <a:t>PATTERN</a:t>
-            </a:r>
-            <a:endParaRPr kumimoji="0" lang="en-US" sz="900" b="0" i="0" u="none" strike="noStrike" kern="1200" cap="none" spc="0" normalizeH="0" baseline="0" noProof="0" dirty="0">
-              <a:ln>
-                <a:noFill/>
-              </a:ln>
-              <a:solidFill>
-                <a:prstClr val="black"/>
-              </a:solidFill>
-              <a:effectLst/>
-              <a:uLnTx/>
-              <a:uFillTx/>
-              <a:latin typeface="Calibri" panose="020F0502020204030204"/>
-              <a:ea typeface="+mn-ea"/>
-              <a:cs typeface="+mn-cs"/>
-            </a:endParaRPr>
-          </a:p>
-        </p:txBody>
-      </p:sp>
-      <p:sp>
-        <p:nvSpPr>
-          <p:cNvPr id="9" name="Text 7"/>
-          <p:cNvSpPr/>
-          <p:nvPr/>
-        </p:nvSpPr>
-        <p:spPr>
-          <a:xfrm>
-            <a:off x="1874520" y="365760"/>
-            <a:ext cx="7772400" cy="896112"/>
-          </a:xfrm>
-          <a:prstGeom prst="rect">
-            <a:avLst/>
-          </a:prstGeom>
-          <a:noFill/>
-          <a:ln/>
-        </p:spPr>
-        <p:txBody>
-          <a:bodyPr wrap="square" lIns="0" tIns="0" rIns="0" bIns="0" rtlCol="0" anchor="t"/>
-          <a:lstStyle/>
-          <a:p>
-            <a:pPr marL="0" marR="0" lvl="0" indent="0" algn="l" defTabSz="914400" rtl="0" eaLnBrk="1" fontAlgn="auto" latinLnBrk="0" hangingPunct="1">
-              <a:lnSpc>
-                <a:spcPct val="100000"/>
-              </a:lnSpc>
-              <a:spcBef>
-                <a:spcPts val="0"/>
-              </a:spcBef>
-              <a:spcAft>
-                <a:spcPts val="0"/>
-              </a:spcAft>
-              <a:buClrTx/>
-              <a:buSzTx/>
-              <a:buFontTx/>
-              <a:buNone/>
-              <a:tabLst/>
-              <a:defRPr/>
-            </a:pPr>
-            <a:r>
-              <a:rPr kumimoji="0" lang="en-US" sz="2500" b="1" i="0" u="none" strike="noStrike" kern="1200" cap="none" spc="0" normalizeH="0" baseline="0" noProof="0" dirty="0">
-                <a:ln>
-                  <a:noFill/>
-                </a:ln>
-                <a:solidFill>
-                  <a:srgbClr val="242424"/>
-                </a:solidFill>
-                <a:effectLst/>
-                <a:uLnTx/>
-                <a:uFillTx/>
-                <a:latin typeface="Segoe UI Semibold" pitchFamily="34" charset="0"/>
-                <a:ea typeface="Segoe UI Semibold" pitchFamily="34" charset="-122"/>
-                <a:cs typeface="Segoe UI Semibold" pitchFamily="34" charset="-120"/>
-              </a:rPr>
-              <a:t>Agent 365 &amp; ROI — govern and prove value at scale</a:t>
-            </a:r>
-            <a:endParaRPr kumimoji="0" lang="en-US" sz="2500" b="0" i="0" u="none" strike="noStrike" kern="1200" cap="none" spc="0" normalizeH="0" baseline="0" noProof="0" dirty="0">
-              <a:ln>
-                <a:noFill/>
-              </a:ln>
-              <a:solidFill>
-                <a:prstClr val="black"/>
-              </a:solidFill>
-              <a:effectLst/>
-              <a:uLnTx/>
-              <a:uFillTx/>
-              <a:latin typeface="Calibri" panose="020F0502020204030204"/>
-              <a:ea typeface="+mn-ea"/>
-              <a:cs typeface="+mn-cs"/>
-            </a:endParaRPr>
-          </a:p>
-        </p:txBody>
-      </p:sp>
-      <p:sp>
-        <p:nvSpPr>
-          <p:cNvPr id="10" name="Text 8"/>
-          <p:cNvSpPr/>
-          <p:nvPr/>
-        </p:nvSpPr>
-        <p:spPr>
-          <a:xfrm>
-            <a:off x="566928" y="1371600"/>
-            <a:ext cx="11064240" cy="530352"/>
-          </a:xfrm>
-          <a:prstGeom prst="rect">
-            <a:avLst/>
-          </a:prstGeom>
-          <a:noFill/>
-          <a:ln/>
-        </p:spPr>
-        <p:txBody>
-          <a:bodyPr wrap="square" lIns="0" tIns="0" rIns="0" bIns="0" rtlCol="0" anchor="t"/>
-          <a:lstStyle/>
-          <a:p>
-            <a:pPr marL="0" marR="0" lvl="0" indent="0" algn="l" defTabSz="914400" rtl="0" eaLnBrk="1" fontAlgn="auto" latinLnBrk="0" hangingPunct="1">
-              <a:lnSpc>
-                <a:spcPct val="100000"/>
-              </a:lnSpc>
-              <a:spcBef>
-                <a:spcPts val="0"/>
-              </a:spcBef>
-              <a:spcAft>
-                <a:spcPts val="0"/>
-              </a:spcAft>
-              <a:buClrTx/>
-              <a:buSzTx/>
-              <a:buFontTx/>
-              <a:buNone/>
-              <a:tabLst/>
-              <a:defRPr/>
-            </a:pPr>
-            <a:r>
-              <a:rPr kumimoji="0" lang="en-US" sz="1450" b="1" i="1" u="none" strike="noStrike" kern="1200" cap="none" spc="0" normalizeH="0" baseline="0" noProof="0" dirty="0">
-                <a:ln>
-                  <a:noFill/>
-                </a:ln>
-                <a:solidFill>
-                  <a:srgbClr val="8661C5"/>
-                </a:solidFill>
-                <a:effectLst/>
-                <a:uLnTx/>
-                <a:uFillTx/>
-                <a:latin typeface="Segoe UI Semibold" pitchFamily="34" charset="0"/>
-                <a:ea typeface="Segoe UI Semibold" pitchFamily="34" charset="-122"/>
-                <a:cs typeface="Segoe UI Semibold" pitchFamily="34" charset="-120"/>
-              </a:rPr>
-              <a:t>“You can't manage what you can't see — and you can't fund what you can't measure.”</a:t>
-            </a:r>
-            <a:endParaRPr kumimoji="0" lang="en-US" sz="1450" b="0" i="0" u="none" strike="noStrike" kern="1200" cap="none" spc="0" normalizeH="0" baseline="0" noProof="0" dirty="0">
-              <a:ln>
-                <a:noFill/>
-              </a:ln>
-              <a:solidFill>
-                <a:prstClr val="black"/>
-              </a:solidFill>
-              <a:effectLst/>
-              <a:uLnTx/>
-              <a:uFillTx/>
-              <a:latin typeface="Calibri" panose="020F0502020204030204"/>
-              <a:ea typeface="+mn-ea"/>
-              <a:cs typeface="+mn-cs"/>
-            </a:endParaRPr>
-          </a:p>
-        </p:txBody>
-      </p:sp>
-      <p:sp>
-        <p:nvSpPr>
-          <p:cNvPr id="11" name="Shape 9"/>
-          <p:cNvSpPr/>
-          <p:nvPr/>
-        </p:nvSpPr>
-        <p:spPr>
-          <a:xfrm>
-            <a:off x="566928" y="2048256"/>
-            <a:ext cx="841248" cy="292608"/>
-          </a:xfrm>
-          <a:prstGeom prst="roundRect">
-            <a:avLst>
-              <a:gd name="adj" fmla="val 50000"/>
-            </a:avLst>
-          </a:prstGeom>
-          <a:solidFill>
-            <a:srgbClr val="107C41"/>
-          </a:solidFill>
-          <a:ln/>
-        </p:spPr>
-        <p:txBody>
-          <a:bodyPr/>
-          <a:lstStyle/>
-          <a:p>
-            <a:pPr marL="0" marR="0" lvl="0" indent="0" algn="l" defTabSz="914400" rtl="0" eaLnBrk="1" fontAlgn="auto" latinLnBrk="0" hangingPunct="1">
-              <a:lnSpc>
-                <a:spcPct val="100000"/>
-              </a:lnSpc>
-              <a:spcBef>
-                <a:spcPts val="0"/>
-              </a:spcBef>
-              <a:spcAft>
-                <a:spcPts val="0"/>
-              </a:spcAft>
-              <a:buClrTx/>
-              <a:buSzTx/>
-              <a:buFontTx/>
-              <a:buNone/>
-              <a:tabLst/>
-              <a:defRPr/>
-            </a:pPr>
-            <a:endParaRPr kumimoji="0" lang="en-ZA" sz="1800" b="0" i="0" u="none" strike="noStrike" kern="1200" cap="none" spc="0" normalizeH="0" baseline="0" noProof="0">
-              <a:ln>
-                <a:noFill/>
-              </a:ln>
-              <a:solidFill>
-                <a:prstClr val="black"/>
-              </a:solidFill>
-              <a:effectLst/>
-              <a:uLnTx/>
-              <a:uFillTx/>
-              <a:latin typeface="Calibri" panose="020F0502020204030204"/>
-              <a:ea typeface="+mn-ea"/>
-              <a:cs typeface="+mn-cs"/>
-            </a:endParaRPr>
-          </a:p>
-        </p:txBody>
-      </p:sp>
-      <p:sp>
-        <p:nvSpPr>
-          <p:cNvPr id="12" name="Text 10"/>
-          <p:cNvSpPr/>
-          <p:nvPr/>
-        </p:nvSpPr>
-        <p:spPr>
-          <a:xfrm>
-            <a:off x="566928" y="2048256"/>
-            <a:ext cx="841248" cy="292608"/>
-          </a:xfrm>
-          <a:prstGeom prst="rect">
-            <a:avLst/>
-          </a:prstGeom>
-          <a:noFill/>
-          <a:ln/>
-        </p:spPr>
-        <p:txBody>
-          <a:bodyPr wrap="square" lIns="0" tIns="0" rIns="0" bIns="0" rtlCol="0" anchor="ctr"/>
-          <a:lstStyle/>
-          <a:p>
-            <a:pPr marL="0" marR="0" lvl="0" indent="0" algn="ctr" defTabSz="914400" rtl="0" eaLnBrk="1" fontAlgn="auto" latinLnBrk="0" hangingPunct="1">
-              <a:lnSpc>
-                <a:spcPct val="100000"/>
-              </a:lnSpc>
-              <a:spcBef>
-                <a:spcPts val="0"/>
-              </a:spcBef>
-              <a:spcAft>
-                <a:spcPts val="0"/>
-              </a:spcAft>
-              <a:buClrTx/>
-              <a:buSzTx/>
-              <a:buFontTx/>
-              <a:buNone/>
-              <a:tabLst/>
-              <a:defRPr/>
-            </a:pPr>
-            <a:r>
-              <a:rPr kumimoji="0" lang="en-US" sz="1000" b="1" i="0" u="none" strike="noStrike" kern="1200" cap="none" spc="0" normalizeH="0" baseline="0" noProof="0" dirty="0">
-                <a:ln>
-                  <a:noFill/>
-                </a:ln>
-                <a:solidFill>
-                  <a:srgbClr val="FFFFFF"/>
-                </a:solidFill>
-                <a:effectLst/>
-                <a:uLnTx/>
-                <a:uFillTx/>
-                <a:latin typeface="Segoe UI Semibold" pitchFamily="34" charset="0"/>
-                <a:ea typeface="Segoe UI Semibold" pitchFamily="34" charset="-122"/>
-                <a:cs typeface="Segoe UI Semibold" pitchFamily="34" charset="-120"/>
-              </a:rPr>
-              <a:t>DEMO</a:t>
-            </a:r>
-            <a:endParaRPr kumimoji="0" lang="en-US" sz="1000" b="0" i="0" u="none" strike="noStrike" kern="1200" cap="none" spc="0" normalizeH="0" baseline="0" noProof="0" dirty="0">
-              <a:ln>
-                <a:noFill/>
-              </a:ln>
-              <a:solidFill>
-                <a:prstClr val="black"/>
-              </a:solidFill>
-              <a:effectLst/>
-              <a:uLnTx/>
-              <a:uFillTx/>
-              <a:latin typeface="Calibri" panose="020F0502020204030204"/>
-              <a:ea typeface="+mn-ea"/>
-              <a:cs typeface="+mn-cs"/>
-            </a:endParaRPr>
-          </a:p>
-        </p:txBody>
-      </p:sp>
-      <p:sp>
-        <p:nvSpPr>
-          <p:cNvPr id="13" name="Text 11"/>
-          <p:cNvSpPr/>
-          <p:nvPr/>
-        </p:nvSpPr>
-        <p:spPr>
-          <a:xfrm>
-            <a:off x="1517904" y="2048256"/>
-            <a:ext cx="10058400" cy="292608"/>
-          </a:xfrm>
-          <a:prstGeom prst="rect">
-            <a:avLst/>
-          </a:prstGeom>
-          <a:noFill/>
-          <a:ln/>
-        </p:spPr>
-        <p:txBody>
-          <a:bodyPr wrap="square" lIns="0" tIns="0" rIns="0" bIns="0" rtlCol="0" anchor="ctr"/>
-          <a:lstStyle/>
-          <a:p>
-            <a:pPr marL="0" marR="0" lvl="0" indent="0" algn="l" defTabSz="914400" rtl="0" eaLnBrk="1" fontAlgn="auto" latinLnBrk="0" hangingPunct="1">
-              <a:lnSpc>
-                <a:spcPct val="100000"/>
-              </a:lnSpc>
-              <a:spcBef>
-                <a:spcPts val="0"/>
-              </a:spcBef>
-              <a:spcAft>
-                <a:spcPts val="0"/>
-              </a:spcAft>
-              <a:buClrTx/>
-              <a:buSzTx/>
-              <a:buFontTx/>
-              <a:buNone/>
-              <a:tabLst/>
-              <a:defRPr/>
-            </a:pPr>
-            <a:r>
-              <a:rPr kumimoji="0" lang="en-US" sz="1200" b="0" i="0" u="none" strike="noStrike" kern="1200" cap="none" spc="0" normalizeH="0" baseline="0" noProof="0" dirty="0">
-                <a:ln>
-                  <a:noFill/>
-                </a:ln>
-                <a:solidFill>
-                  <a:srgbClr val="605E5C"/>
-                </a:solidFill>
-                <a:effectLst/>
-                <a:uLnTx/>
-                <a:uFillTx/>
-                <a:latin typeface="Segoe UI" pitchFamily="34" charset="0"/>
-                <a:ea typeface="Segoe UI" pitchFamily="34" charset="-122"/>
-                <a:cs typeface="Segoe UI" pitchFamily="34" charset="-120"/>
-              </a:rPr>
-              <a:t>ROI-for-agents table ties cost to task completion &amp; time saved (live); Agent 365 inventory + Entra Agent ID shown in portal.</a:t>
-            </a:r>
-            <a:endParaRPr kumimoji="0" lang="en-US" sz="1200" b="0" i="0" u="none" strike="noStrike" kern="1200" cap="none" spc="0" normalizeH="0" baseline="0" noProof="0" dirty="0">
-              <a:ln>
-                <a:noFill/>
-              </a:ln>
-              <a:solidFill>
-                <a:prstClr val="black"/>
-              </a:solidFill>
-              <a:effectLst/>
-              <a:uLnTx/>
-              <a:uFillTx/>
-              <a:latin typeface="Calibri" panose="020F0502020204030204"/>
-              <a:ea typeface="+mn-ea"/>
-              <a:cs typeface="+mn-cs"/>
-            </a:endParaRPr>
-          </a:p>
-        </p:txBody>
-      </p:sp>
-      <p:sp>
-        <p:nvSpPr>
-          <p:cNvPr id="14" name="Shape 12"/>
-          <p:cNvSpPr/>
-          <p:nvPr/>
-        </p:nvSpPr>
-        <p:spPr>
-          <a:xfrm>
-            <a:off x="640080" y="3200400"/>
-            <a:ext cx="2286000" cy="868680"/>
-          </a:xfrm>
-          <a:prstGeom prst="roundRect">
-            <a:avLst>
-              <a:gd name="adj" fmla="val 8421"/>
-            </a:avLst>
-          </a:prstGeom>
-          <a:solidFill>
-            <a:srgbClr val="ECEBF3"/>
-          </a:solidFill>
-          <a:ln w="12700">
-            <a:solidFill>
-              <a:srgbClr val="E5E1EF"/>
-            </a:solidFill>
-            <a:prstDash val="solid"/>
-          </a:ln>
-          <a:effectLst>
-            <a:outerShdw blurRad="76200" dist="25400" dir="8100000" algn="bl" rotWithShape="0">
-              <a:srgbClr val="8A8886">
-                <a:alpha val="28000"/>
-              </a:srgbClr>
-            </a:outerShdw>
-          </a:effectLst>
-        </p:spPr>
-        <p:txBody>
-          <a:bodyPr/>
-          <a:lstStyle/>
-          <a:p>
-            <a:pPr marL="0" marR="0" lvl="0" indent="0" algn="l" defTabSz="914400" rtl="0" eaLnBrk="1" fontAlgn="auto" latinLnBrk="0" hangingPunct="1">
-              <a:lnSpc>
-                <a:spcPct val="100000"/>
-              </a:lnSpc>
-              <a:spcBef>
-                <a:spcPts val="0"/>
-              </a:spcBef>
-              <a:spcAft>
-                <a:spcPts val="0"/>
-              </a:spcAft>
-              <a:buClrTx/>
-              <a:buSzTx/>
-              <a:buFontTx/>
-              <a:buNone/>
-              <a:tabLst/>
-              <a:defRPr/>
-            </a:pPr>
-            <a:endParaRPr kumimoji="0" lang="en-ZA" sz="1800" b="0" i="0" u="none" strike="noStrike" kern="1200" cap="none" spc="0" normalizeH="0" baseline="0" noProof="0">
-              <a:ln>
-                <a:noFill/>
-              </a:ln>
-              <a:solidFill>
-                <a:prstClr val="black"/>
-              </a:solidFill>
-              <a:effectLst/>
-              <a:uLnTx/>
-              <a:uFillTx/>
-              <a:latin typeface="Calibri" panose="020F0502020204030204"/>
-              <a:ea typeface="+mn-ea"/>
-              <a:cs typeface="+mn-cs"/>
-            </a:endParaRPr>
-          </a:p>
-        </p:txBody>
-      </p:sp>
-      <p:sp>
-        <p:nvSpPr>
-          <p:cNvPr id="15" name="Text 13"/>
-          <p:cNvSpPr/>
-          <p:nvPr/>
-        </p:nvSpPr>
-        <p:spPr>
-          <a:xfrm>
-            <a:off x="685800" y="3200400"/>
-            <a:ext cx="2194560" cy="868680"/>
-          </a:xfrm>
-          <a:prstGeom prst="rect">
-            <a:avLst/>
-          </a:prstGeom>
-          <a:noFill/>
-          <a:ln/>
-        </p:spPr>
-        <p:txBody>
-          <a:bodyPr wrap="square" lIns="25400" tIns="25400" rIns="25400" bIns="25400" rtlCol="0" anchor="ctr"/>
-          <a:lstStyle/>
-          <a:p>
-            <a:pPr marL="0" marR="0" lvl="0" indent="0" algn="ctr" defTabSz="914400" rtl="0" eaLnBrk="1" fontAlgn="auto" latinLnBrk="0" hangingPunct="1">
-              <a:lnSpc>
-                <a:spcPct val="95000"/>
-              </a:lnSpc>
-              <a:spcBef>
-                <a:spcPts val="0"/>
-              </a:spcBef>
-              <a:spcAft>
-                <a:spcPts val="0"/>
-              </a:spcAft>
-              <a:buClrTx/>
-              <a:buSzTx/>
-              <a:buFontTx/>
-              <a:buNone/>
-              <a:tabLst/>
-              <a:defRPr/>
-            </a:pPr>
-            <a:r>
-              <a:rPr kumimoji="0" lang="en-US" sz="1250" b="1" i="0" u="none" strike="noStrike" kern="1200" cap="none" spc="0" normalizeH="0" baseline="0" noProof="0" dirty="0">
-                <a:ln>
-                  <a:noFill/>
-                </a:ln>
-                <a:solidFill>
-                  <a:srgbClr val="242424"/>
-                </a:solidFill>
-                <a:effectLst/>
-                <a:uLnTx/>
-                <a:uFillTx/>
-                <a:latin typeface="Segoe UI" pitchFamily="34" charset="0"/>
-                <a:ea typeface="Segoe UI" pitchFamily="34" charset="-122"/>
-                <a:cs typeface="Segoe UI" pitchFamily="34" charset="-120"/>
-              </a:rPr>
-              <a:t>Agent fleet</a:t>
-            </a:r>
-            <a:endParaRPr kumimoji="0" lang="en-US" sz="1250" b="0" i="0" u="none" strike="noStrike" kern="1200" cap="none" spc="0" normalizeH="0" baseline="0" noProof="0" dirty="0">
-              <a:ln>
-                <a:noFill/>
-              </a:ln>
-              <a:solidFill>
-                <a:prstClr val="black"/>
-              </a:solidFill>
-              <a:effectLst/>
-              <a:uLnTx/>
-              <a:uFillTx/>
-              <a:latin typeface="Calibri" panose="020F0502020204030204"/>
-              <a:ea typeface="+mn-ea"/>
-              <a:cs typeface="+mn-cs"/>
-            </a:endParaRPr>
-          </a:p>
-          <a:p>
-            <a:pPr marL="0" marR="0" lvl="0" indent="0" algn="ctr" defTabSz="914400" rtl="0" eaLnBrk="1" fontAlgn="auto" latinLnBrk="0" hangingPunct="1">
-              <a:lnSpc>
-                <a:spcPct val="95000"/>
-              </a:lnSpc>
-              <a:spcBef>
-                <a:spcPts val="0"/>
-              </a:spcBef>
-              <a:spcAft>
-                <a:spcPts val="0"/>
-              </a:spcAft>
-              <a:buClrTx/>
-              <a:buSzTx/>
-              <a:buFontTx/>
-              <a:buNone/>
-              <a:tabLst/>
-              <a:defRPr/>
-            </a:pPr>
-            <a:r>
-              <a:rPr kumimoji="0" lang="en-US" sz="950" b="0" i="1" u="none" strike="noStrike" kern="1200" cap="none" spc="0" normalizeH="0" baseline="0" noProof="0" dirty="0">
-                <a:ln>
-                  <a:noFill/>
-                </a:ln>
-                <a:solidFill>
-                  <a:srgbClr val="605E5C"/>
-                </a:solidFill>
-                <a:effectLst/>
-                <a:uLnTx/>
-                <a:uFillTx/>
-                <a:latin typeface="Segoe UI" pitchFamily="34" charset="0"/>
-                <a:ea typeface="Segoe UI" pitchFamily="34" charset="-122"/>
-                <a:cs typeface="Segoe UI" pitchFamily="34" charset="-120"/>
-              </a:rPr>
-              <a:t>Foundry · Copilot Studio</a:t>
-            </a:r>
-            <a:endParaRPr kumimoji="0" lang="en-US" sz="1250" b="0" i="0" u="none" strike="noStrike" kern="1200" cap="none" spc="0" normalizeH="0" baseline="0" noProof="0" dirty="0">
-              <a:ln>
-                <a:noFill/>
-              </a:ln>
-              <a:solidFill>
-                <a:prstClr val="black"/>
-              </a:solidFill>
-              <a:effectLst/>
-              <a:uLnTx/>
-              <a:uFillTx/>
-              <a:latin typeface="Calibri" panose="020F0502020204030204"/>
-              <a:ea typeface="+mn-ea"/>
-              <a:cs typeface="+mn-cs"/>
-            </a:endParaRPr>
-          </a:p>
-        </p:txBody>
-      </p:sp>
-      <p:sp>
-        <p:nvSpPr>
-          <p:cNvPr id="16" name="Shape 14"/>
-          <p:cNvSpPr/>
-          <p:nvPr/>
-        </p:nvSpPr>
-        <p:spPr>
-          <a:xfrm>
-            <a:off x="3291840" y="3108960"/>
-            <a:ext cx="2926080" cy="960120"/>
-          </a:xfrm>
-          <a:prstGeom prst="roundRect">
-            <a:avLst>
-              <a:gd name="adj" fmla="val 7619"/>
-            </a:avLst>
-          </a:prstGeom>
-          <a:solidFill>
-            <a:srgbClr val="0078D4"/>
-          </a:solidFill>
-          <a:ln w="12700">
-            <a:solidFill>
-              <a:srgbClr val="0078D4"/>
-            </a:solidFill>
-            <a:prstDash val="solid"/>
-          </a:ln>
-          <a:effectLst>
-            <a:outerShdw blurRad="76200" dist="25400" dir="8100000" algn="bl" rotWithShape="0">
-              <a:srgbClr val="8A8886">
-                <a:alpha val="28000"/>
-              </a:srgbClr>
-            </a:outerShdw>
-          </a:effectLst>
-        </p:spPr>
-        <p:txBody>
-          <a:bodyPr/>
-          <a:lstStyle/>
-          <a:p>
-            <a:pPr marL="0" marR="0" lvl="0" indent="0" algn="l" defTabSz="914400" rtl="0" eaLnBrk="1" fontAlgn="auto" latinLnBrk="0" hangingPunct="1">
-              <a:lnSpc>
-                <a:spcPct val="100000"/>
-              </a:lnSpc>
-              <a:spcBef>
-                <a:spcPts val="0"/>
-              </a:spcBef>
-              <a:spcAft>
-                <a:spcPts val="0"/>
-              </a:spcAft>
-              <a:buClrTx/>
-              <a:buSzTx/>
-              <a:buFontTx/>
-              <a:buNone/>
-              <a:tabLst/>
-              <a:defRPr/>
-            </a:pPr>
-            <a:endParaRPr kumimoji="0" lang="en-ZA" sz="1800" b="0" i="0" u="none" strike="noStrike" kern="1200" cap="none" spc="0" normalizeH="0" baseline="0" noProof="0">
-              <a:ln>
-                <a:noFill/>
-              </a:ln>
-              <a:solidFill>
-                <a:prstClr val="black"/>
-              </a:solidFill>
-              <a:effectLst/>
-              <a:uLnTx/>
-              <a:uFillTx/>
-              <a:latin typeface="Calibri" panose="020F0502020204030204"/>
-              <a:ea typeface="+mn-ea"/>
-              <a:cs typeface="+mn-cs"/>
-            </a:endParaRPr>
-          </a:p>
-        </p:txBody>
-      </p:sp>
-      <p:sp>
-        <p:nvSpPr>
-          <p:cNvPr id="17" name="Text 15"/>
-          <p:cNvSpPr/>
-          <p:nvPr/>
-        </p:nvSpPr>
-        <p:spPr>
-          <a:xfrm>
-            <a:off x="3337560" y="3108960"/>
-            <a:ext cx="2834640" cy="960120"/>
-          </a:xfrm>
-          <a:prstGeom prst="rect">
-            <a:avLst/>
-          </a:prstGeom>
-          <a:noFill/>
-          <a:ln/>
-        </p:spPr>
-        <p:txBody>
-          <a:bodyPr wrap="square" lIns="25400" tIns="25400" rIns="25400" bIns="25400" rtlCol="0" anchor="ctr"/>
-          <a:lstStyle/>
-          <a:p>
-            <a:pPr marL="0" marR="0" lvl="0" indent="0" algn="ctr" defTabSz="914400" rtl="0" eaLnBrk="1" fontAlgn="auto" latinLnBrk="0" hangingPunct="1">
-              <a:lnSpc>
-                <a:spcPct val="95000"/>
-              </a:lnSpc>
-              <a:spcBef>
-                <a:spcPts val="0"/>
-              </a:spcBef>
-              <a:spcAft>
-                <a:spcPts val="0"/>
-              </a:spcAft>
-              <a:buClrTx/>
-              <a:buSzTx/>
-              <a:buFontTx/>
-              <a:buNone/>
-              <a:tabLst/>
-              <a:defRPr/>
-            </a:pPr>
-            <a:r>
-              <a:rPr kumimoji="0" lang="en-US" sz="1250" b="1" i="0" u="none" strike="noStrike" kern="1200" cap="none" spc="0" normalizeH="0" baseline="0" noProof="0" dirty="0">
-                <a:ln>
-                  <a:noFill/>
-                </a:ln>
-                <a:solidFill>
-                  <a:srgbClr val="FFFFFF"/>
-                </a:solidFill>
-                <a:effectLst/>
-                <a:uLnTx/>
-                <a:uFillTx/>
-                <a:latin typeface="Segoe UI" pitchFamily="34" charset="0"/>
-                <a:ea typeface="Segoe UI" pitchFamily="34" charset="-122"/>
-                <a:cs typeface="Segoe UI" pitchFamily="34" charset="-120"/>
-              </a:rPr>
-              <a:t>Agent 365</a:t>
-            </a:r>
-            <a:endParaRPr kumimoji="0" lang="en-US" sz="1250" b="0" i="0" u="none" strike="noStrike" kern="1200" cap="none" spc="0" normalizeH="0" baseline="0" noProof="0" dirty="0">
-              <a:ln>
-                <a:noFill/>
-              </a:ln>
-              <a:solidFill>
-                <a:prstClr val="black"/>
-              </a:solidFill>
-              <a:effectLst/>
-              <a:uLnTx/>
-              <a:uFillTx/>
-              <a:latin typeface="Calibri" panose="020F0502020204030204"/>
-              <a:ea typeface="+mn-ea"/>
-              <a:cs typeface="+mn-cs"/>
-            </a:endParaRPr>
-          </a:p>
-          <a:p>
-            <a:pPr marL="0" marR="0" lvl="0" indent="0" algn="ctr" defTabSz="914400" rtl="0" eaLnBrk="1" fontAlgn="auto" latinLnBrk="0" hangingPunct="1">
-              <a:lnSpc>
-                <a:spcPct val="95000"/>
-              </a:lnSpc>
-              <a:spcBef>
-                <a:spcPts val="0"/>
-              </a:spcBef>
-              <a:spcAft>
-                <a:spcPts val="0"/>
-              </a:spcAft>
-              <a:buClrTx/>
-              <a:buSzTx/>
-              <a:buFontTx/>
-              <a:buNone/>
-              <a:tabLst/>
-              <a:defRPr/>
-            </a:pPr>
-            <a:r>
-              <a:rPr kumimoji="0" lang="en-US" sz="950" b="0" i="1" u="none" strike="noStrike" kern="1200" cap="none" spc="0" normalizeH="0" baseline="0" noProof="0" dirty="0">
-                <a:ln>
-                  <a:noFill/>
-                </a:ln>
-                <a:solidFill>
-                  <a:srgbClr val="E4F3FC"/>
-                </a:solidFill>
-                <a:effectLst/>
-                <a:uLnTx/>
-                <a:uFillTx/>
-                <a:latin typeface="Segoe UI" pitchFamily="34" charset="0"/>
-                <a:ea typeface="Segoe UI" pitchFamily="34" charset="-122"/>
-                <a:cs typeface="Segoe UI" pitchFamily="34" charset="-120"/>
-              </a:rPr>
-              <a:t>inventory · identity · policy</a:t>
-            </a:r>
-            <a:endParaRPr kumimoji="0" lang="en-US" sz="1250" b="0" i="0" u="none" strike="noStrike" kern="1200" cap="none" spc="0" normalizeH="0" baseline="0" noProof="0" dirty="0">
-              <a:ln>
-                <a:noFill/>
-              </a:ln>
-              <a:solidFill>
-                <a:prstClr val="black"/>
-              </a:solidFill>
-              <a:effectLst/>
-              <a:uLnTx/>
-              <a:uFillTx/>
-              <a:latin typeface="Calibri" panose="020F0502020204030204"/>
-              <a:ea typeface="+mn-ea"/>
-              <a:cs typeface="+mn-cs"/>
-            </a:endParaRPr>
-          </a:p>
-        </p:txBody>
-      </p:sp>
-      <p:sp>
-        <p:nvSpPr>
-          <p:cNvPr id="18" name="Shape 16"/>
-          <p:cNvSpPr/>
-          <p:nvPr/>
-        </p:nvSpPr>
-        <p:spPr>
-          <a:xfrm>
-            <a:off x="6812280" y="3108960"/>
-            <a:ext cx="2880360" cy="960120"/>
-          </a:xfrm>
-          <a:prstGeom prst="roundRect">
-            <a:avLst>
-              <a:gd name="adj" fmla="val 7619"/>
-            </a:avLst>
-          </a:prstGeom>
-          <a:solidFill>
-            <a:srgbClr val="8661C5"/>
-          </a:solidFill>
-          <a:ln w="12700">
-            <a:solidFill>
-              <a:srgbClr val="8661C5"/>
-            </a:solidFill>
-            <a:prstDash val="solid"/>
-          </a:ln>
-          <a:effectLst>
-            <a:outerShdw blurRad="76200" dist="25400" dir="8100000" algn="bl" rotWithShape="0">
-              <a:srgbClr val="8A8886">
-                <a:alpha val="28000"/>
-              </a:srgbClr>
-            </a:outerShdw>
-          </a:effectLst>
-        </p:spPr>
-        <p:txBody>
-          <a:bodyPr/>
-          <a:lstStyle/>
-          <a:p>
-            <a:pPr marL="0" marR="0" lvl="0" indent="0" algn="l" defTabSz="914400" rtl="0" eaLnBrk="1" fontAlgn="auto" latinLnBrk="0" hangingPunct="1">
-              <a:lnSpc>
-                <a:spcPct val="100000"/>
-              </a:lnSpc>
-              <a:spcBef>
-                <a:spcPts val="0"/>
-              </a:spcBef>
-              <a:spcAft>
-                <a:spcPts val="0"/>
-              </a:spcAft>
-              <a:buClrTx/>
-              <a:buSzTx/>
-              <a:buFontTx/>
-              <a:buNone/>
-              <a:tabLst/>
-              <a:defRPr/>
-            </a:pPr>
-            <a:endParaRPr kumimoji="0" lang="en-ZA" sz="1800" b="0" i="0" u="none" strike="noStrike" kern="1200" cap="none" spc="0" normalizeH="0" baseline="0" noProof="0">
-              <a:ln>
-                <a:noFill/>
-              </a:ln>
-              <a:solidFill>
-                <a:prstClr val="black"/>
-              </a:solidFill>
-              <a:effectLst/>
-              <a:uLnTx/>
-              <a:uFillTx/>
-              <a:latin typeface="Calibri" panose="020F0502020204030204"/>
-              <a:ea typeface="+mn-ea"/>
-              <a:cs typeface="+mn-cs"/>
-            </a:endParaRPr>
-          </a:p>
-        </p:txBody>
-      </p:sp>
-      <p:sp>
-        <p:nvSpPr>
-          <p:cNvPr id="19" name="Text 17"/>
-          <p:cNvSpPr/>
-          <p:nvPr/>
-        </p:nvSpPr>
-        <p:spPr>
-          <a:xfrm>
-            <a:off x="6858000" y="3108960"/>
-            <a:ext cx="2788920" cy="960120"/>
-          </a:xfrm>
-          <a:prstGeom prst="rect">
-            <a:avLst/>
-          </a:prstGeom>
-          <a:noFill/>
-          <a:ln/>
-        </p:spPr>
-        <p:txBody>
-          <a:bodyPr wrap="square" lIns="25400" tIns="25400" rIns="25400" bIns="25400" rtlCol="0" anchor="ctr"/>
-          <a:lstStyle/>
-          <a:p>
-            <a:pPr marL="0" marR="0" lvl="0" indent="0" algn="ctr" defTabSz="914400" rtl="0" eaLnBrk="1" fontAlgn="auto" latinLnBrk="0" hangingPunct="1">
-              <a:lnSpc>
-                <a:spcPct val="95000"/>
-              </a:lnSpc>
-              <a:spcBef>
-                <a:spcPts val="0"/>
-              </a:spcBef>
-              <a:spcAft>
-                <a:spcPts val="0"/>
-              </a:spcAft>
-              <a:buClrTx/>
-              <a:buSzTx/>
-              <a:buFontTx/>
-              <a:buNone/>
-              <a:tabLst/>
-              <a:defRPr/>
-            </a:pPr>
-            <a:r>
-              <a:rPr kumimoji="0" lang="en-US" sz="1250" b="1" i="0" u="none" strike="noStrike" kern="1200" cap="none" spc="0" normalizeH="0" baseline="0" noProof="0" dirty="0">
-                <a:ln>
-                  <a:noFill/>
-                </a:ln>
-                <a:solidFill>
-                  <a:srgbClr val="FFFFFF"/>
-                </a:solidFill>
-                <a:effectLst/>
-                <a:uLnTx/>
-                <a:uFillTx/>
-                <a:latin typeface="Segoe UI" pitchFamily="34" charset="0"/>
-                <a:ea typeface="Segoe UI" pitchFamily="34" charset="-122"/>
-                <a:cs typeface="Segoe UI" pitchFamily="34" charset="-120"/>
-              </a:rPr>
-              <a:t>ROI for agents</a:t>
-            </a:r>
-            <a:endParaRPr kumimoji="0" lang="en-US" sz="1250" b="0" i="0" u="none" strike="noStrike" kern="1200" cap="none" spc="0" normalizeH="0" baseline="0" noProof="0" dirty="0">
-              <a:ln>
-                <a:noFill/>
-              </a:ln>
-              <a:solidFill>
-                <a:prstClr val="black"/>
-              </a:solidFill>
-              <a:effectLst/>
-              <a:uLnTx/>
-              <a:uFillTx/>
-              <a:latin typeface="Calibri" panose="020F0502020204030204"/>
-              <a:ea typeface="+mn-ea"/>
-              <a:cs typeface="+mn-cs"/>
-            </a:endParaRPr>
-          </a:p>
-          <a:p>
-            <a:pPr marL="0" marR="0" lvl="0" indent="0" algn="ctr" defTabSz="914400" rtl="0" eaLnBrk="1" fontAlgn="auto" latinLnBrk="0" hangingPunct="1">
-              <a:lnSpc>
-                <a:spcPct val="95000"/>
-              </a:lnSpc>
-              <a:spcBef>
-                <a:spcPts val="0"/>
-              </a:spcBef>
-              <a:spcAft>
-                <a:spcPts val="0"/>
-              </a:spcAft>
-              <a:buClrTx/>
-              <a:buSzTx/>
-              <a:buFontTx/>
-              <a:buNone/>
-              <a:tabLst/>
-              <a:defRPr/>
-            </a:pPr>
-            <a:r>
-              <a:rPr kumimoji="0" lang="en-US" sz="950" b="0" i="1" u="none" strike="noStrike" kern="1200" cap="none" spc="0" normalizeH="0" baseline="0" noProof="0" dirty="0">
-                <a:ln>
-                  <a:noFill/>
-                </a:ln>
-                <a:solidFill>
-                  <a:srgbClr val="ECE1F8"/>
-                </a:solidFill>
-                <a:effectLst/>
-                <a:uLnTx/>
-                <a:uFillTx/>
-                <a:latin typeface="Segoe UI" pitchFamily="34" charset="0"/>
-                <a:ea typeface="Segoe UI" pitchFamily="34" charset="-122"/>
-                <a:cs typeface="Segoe UI" pitchFamily="34" charset="-120"/>
-              </a:rPr>
-              <a:t>cost ↔ outcome</a:t>
-            </a:r>
-            <a:endParaRPr kumimoji="0" lang="en-US" sz="1250" b="0" i="0" u="none" strike="noStrike" kern="1200" cap="none" spc="0" normalizeH="0" baseline="0" noProof="0" dirty="0">
-              <a:ln>
-                <a:noFill/>
-              </a:ln>
-              <a:solidFill>
-                <a:prstClr val="black"/>
-              </a:solidFill>
-              <a:effectLst/>
-              <a:uLnTx/>
-              <a:uFillTx/>
-              <a:latin typeface="Calibri" panose="020F0502020204030204"/>
-              <a:ea typeface="+mn-ea"/>
-              <a:cs typeface="+mn-cs"/>
-            </a:endParaRPr>
-          </a:p>
-        </p:txBody>
-      </p:sp>
-      <p:sp>
-        <p:nvSpPr>
-          <p:cNvPr id="20" name="Shape 18"/>
-          <p:cNvSpPr/>
-          <p:nvPr/>
-        </p:nvSpPr>
-        <p:spPr>
-          <a:xfrm>
-            <a:off x="10058400" y="3200400"/>
-            <a:ext cx="1463040" cy="868680"/>
-          </a:xfrm>
-          <a:prstGeom prst="roundRect">
-            <a:avLst>
-              <a:gd name="adj" fmla="val 8421"/>
-            </a:avLst>
-          </a:prstGeom>
-          <a:solidFill>
-            <a:srgbClr val="FFFFFF"/>
-          </a:solidFill>
-          <a:ln w="19050">
-            <a:solidFill>
-              <a:srgbClr val="8661C5"/>
-            </a:solidFill>
-            <a:prstDash val="solid"/>
-          </a:ln>
-          <a:effectLst>
-            <a:outerShdw blurRad="76200" dist="25400" dir="8100000" algn="bl" rotWithShape="0">
-              <a:srgbClr val="8A8886">
-                <a:alpha val="28000"/>
-              </a:srgbClr>
-            </a:outerShdw>
-          </a:effectLst>
-        </p:spPr>
-        <p:txBody>
-          <a:bodyPr/>
-          <a:lstStyle/>
-          <a:p>
-            <a:pPr marL="0" marR="0" lvl="0" indent="0" algn="l" defTabSz="914400" rtl="0" eaLnBrk="1" fontAlgn="auto" latinLnBrk="0" hangingPunct="1">
-              <a:lnSpc>
-                <a:spcPct val="100000"/>
-              </a:lnSpc>
-              <a:spcBef>
-                <a:spcPts val="0"/>
-              </a:spcBef>
-              <a:spcAft>
-                <a:spcPts val="0"/>
-              </a:spcAft>
-              <a:buClrTx/>
-              <a:buSzTx/>
-              <a:buFontTx/>
-              <a:buNone/>
-              <a:tabLst/>
-              <a:defRPr/>
-            </a:pPr>
-            <a:endParaRPr kumimoji="0" lang="en-ZA" sz="1800" b="0" i="0" u="none" strike="noStrike" kern="1200" cap="none" spc="0" normalizeH="0" baseline="0" noProof="0">
-              <a:ln>
-                <a:noFill/>
-              </a:ln>
-              <a:solidFill>
-                <a:prstClr val="black"/>
-              </a:solidFill>
-              <a:effectLst/>
-              <a:uLnTx/>
-              <a:uFillTx/>
-              <a:latin typeface="Calibri" panose="020F0502020204030204"/>
-              <a:ea typeface="+mn-ea"/>
-              <a:cs typeface="+mn-cs"/>
-            </a:endParaRPr>
-          </a:p>
-        </p:txBody>
-      </p:sp>
-      <p:sp>
-        <p:nvSpPr>
-          <p:cNvPr id="21" name="Text 19"/>
-          <p:cNvSpPr/>
-          <p:nvPr/>
-        </p:nvSpPr>
-        <p:spPr>
-          <a:xfrm>
-            <a:off x="10104120" y="3200400"/>
-            <a:ext cx="1371600" cy="868680"/>
-          </a:xfrm>
-          <a:prstGeom prst="rect">
-            <a:avLst/>
-          </a:prstGeom>
-          <a:noFill/>
-          <a:ln/>
-        </p:spPr>
-        <p:txBody>
-          <a:bodyPr wrap="square" lIns="25400" tIns="25400" rIns="25400" bIns="25400" rtlCol="0" anchor="ctr"/>
-          <a:lstStyle/>
-          <a:p>
-            <a:pPr marL="0" marR="0" lvl="0" indent="0" algn="ctr" defTabSz="914400" rtl="0" eaLnBrk="1" fontAlgn="auto" latinLnBrk="0" hangingPunct="1">
-              <a:lnSpc>
-                <a:spcPct val="95000"/>
-              </a:lnSpc>
-              <a:spcBef>
-                <a:spcPts val="0"/>
-              </a:spcBef>
-              <a:spcAft>
-                <a:spcPts val="0"/>
-              </a:spcAft>
-              <a:buClrTx/>
-              <a:buSzTx/>
-              <a:buFontTx/>
-              <a:buNone/>
-              <a:tabLst/>
-              <a:defRPr/>
-            </a:pPr>
-            <a:r>
-              <a:rPr kumimoji="0" lang="en-US" sz="1250" b="1" i="0" u="none" strike="noStrike" kern="1200" cap="none" spc="0" normalizeH="0" baseline="0" noProof="0" dirty="0">
-                <a:ln>
-                  <a:noFill/>
-                </a:ln>
-                <a:solidFill>
-                  <a:srgbClr val="8661C5"/>
-                </a:solidFill>
-                <a:effectLst/>
-                <a:uLnTx/>
-                <a:uFillTx/>
-                <a:latin typeface="Segoe UI" pitchFamily="34" charset="0"/>
-                <a:ea typeface="Segoe UI" pitchFamily="34" charset="-122"/>
-                <a:cs typeface="Segoe UI" pitchFamily="34" charset="-120"/>
-              </a:rPr>
-              <a:t>Value + trend</a:t>
-            </a:r>
-            <a:endParaRPr kumimoji="0" lang="en-US" sz="1250" b="0" i="0" u="none" strike="noStrike" kern="1200" cap="none" spc="0" normalizeH="0" baseline="0" noProof="0" dirty="0">
-              <a:ln>
-                <a:noFill/>
-              </a:ln>
-              <a:solidFill>
-                <a:prstClr val="black"/>
-              </a:solidFill>
-              <a:effectLst/>
-              <a:uLnTx/>
-              <a:uFillTx/>
-              <a:latin typeface="Calibri" panose="020F0502020204030204"/>
-              <a:ea typeface="+mn-ea"/>
-              <a:cs typeface="+mn-cs"/>
-            </a:endParaRPr>
-          </a:p>
-        </p:txBody>
-      </p:sp>
-      <p:sp>
-        <p:nvSpPr>
-          <p:cNvPr id="22" name="Shape 20"/>
-          <p:cNvSpPr/>
-          <p:nvPr/>
-        </p:nvSpPr>
-        <p:spPr>
-          <a:xfrm>
-            <a:off x="2926080" y="3566160"/>
-            <a:ext cx="365760" cy="914"/>
-          </a:xfrm>
-          <a:prstGeom prst="line">
-            <a:avLst/>
-          </a:prstGeom>
-          <a:noFill/>
-          <a:ln w="22225">
-            <a:solidFill>
-              <a:srgbClr val="8A8886"/>
-            </a:solidFill>
-            <a:prstDash val="solid"/>
-            <a:headEnd type="none"/>
-            <a:tailEnd type="triangle"/>
-          </a:ln>
-        </p:spPr>
-        <p:txBody>
-          <a:bodyPr/>
-          <a:lstStyle/>
-          <a:p>
-            <a:pPr marL="0" marR="0" lvl="0" indent="0" algn="l" defTabSz="914400" rtl="0" eaLnBrk="1" fontAlgn="auto" latinLnBrk="0" hangingPunct="1">
-              <a:lnSpc>
-                <a:spcPct val="100000"/>
-              </a:lnSpc>
-              <a:spcBef>
-                <a:spcPts val="0"/>
-              </a:spcBef>
-              <a:spcAft>
-                <a:spcPts val="0"/>
-              </a:spcAft>
-              <a:buClrTx/>
-              <a:buSzTx/>
-              <a:buFontTx/>
-              <a:buNone/>
-              <a:tabLst/>
-              <a:defRPr/>
-            </a:pPr>
-            <a:endParaRPr kumimoji="0" lang="en-ZA" sz="1800" b="0" i="0" u="none" strike="noStrike" kern="1200" cap="none" spc="0" normalizeH="0" baseline="0" noProof="0">
-              <a:ln>
-                <a:noFill/>
-              </a:ln>
-              <a:solidFill>
-                <a:prstClr val="black"/>
-              </a:solidFill>
-              <a:effectLst/>
-              <a:uLnTx/>
-              <a:uFillTx/>
-              <a:latin typeface="Calibri" panose="020F0502020204030204"/>
-              <a:ea typeface="+mn-ea"/>
-              <a:cs typeface="+mn-cs"/>
-            </a:endParaRPr>
-          </a:p>
-        </p:txBody>
-      </p:sp>
-      <p:sp>
-        <p:nvSpPr>
-          <p:cNvPr id="23" name="Shape 21"/>
-          <p:cNvSpPr/>
-          <p:nvPr/>
-        </p:nvSpPr>
-        <p:spPr>
-          <a:xfrm>
-            <a:off x="6217920" y="3566160"/>
-            <a:ext cx="594360" cy="914"/>
-          </a:xfrm>
-          <a:prstGeom prst="line">
-            <a:avLst/>
-          </a:prstGeom>
-          <a:noFill/>
-          <a:ln w="22225">
-            <a:solidFill>
-              <a:srgbClr val="8A8886"/>
-            </a:solidFill>
-            <a:prstDash val="solid"/>
-            <a:headEnd type="none"/>
-            <a:tailEnd type="triangle"/>
-          </a:ln>
-        </p:spPr>
-        <p:txBody>
-          <a:bodyPr/>
-          <a:lstStyle/>
-          <a:p>
-            <a:pPr marL="0" marR="0" lvl="0" indent="0" algn="l" defTabSz="914400" rtl="0" eaLnBrk="1" fontAlgn="auto" latinLnBrk="0" hangingPunct="1">
-              <a:lnSpc>
-                <a:spcPct val="100000"/>
-              </a:lnSpc>
-              <a:spcBef>
-                <a:spcPts val="0"/>
-              </a:spcBef>
-              <a:spcAft>
-                <a:spcPts val="0"/>
-              </a:spcAft>
-              <a:buClrTx/>
-              <a:buSzTx/>
-              <a:buFontTx/>
-              <a:buNone/>
-              <a:tabLst/>
-              <a:defRPr/>
-            </a:pPr>
-            <a:endParaRPr kumimoji="0" lang="en-ZA" sz="1800" b="0" i="0" u="none" strike="noStrike" kern="1200" cap="none" spc="0" normalizeH="0" baseline="0" noProof="0">
-              <a:ln>
-                <a:noFill/>
-              </a:ln>
-              <a:solidFill>
-                <a:prstClr val="black"/>
-              </a:solidFill>
-              <a:effectLst/>
-              <a:uLnTx/>
-              <a:uFillTx/>
-              <a:latin typeface="Calibri" panose="020F0502020204030204"/>
-              <a:ea typeface="+mn-ea"/>
-              <a:cs typeface="+mn-cs"/>
-            </a:endParaRPr>
-          </a:p>
-        </p:txBody>
-      </p:sp>
-      <p:sp>
-        <p:nvSpPr>
-          <p:cNvPr id="24" name="Shape 22"/>
-          <p:cNvSpPr/>
-          <p:nvPr/>
-        </p:nvSpPr>
-        <p:spPr>
-          <a:xfrm>
-            <a:off x="9692640" y="3566160"/>
-            <a:ext cx="365760" cy="914"/>
-          </a:xfrm>
-          <a:prstGeom prst="line">
-            <a:avLst/>
-          </a:prstGeom>
-          <a:noFill/>
-          <a:ln w="22225">
-            <a:solidFill>
-              <a:srgbClr val="8A8886"/>
-            </a:solidFill>
-            <a:prstDash val="solid"/>
-            <a:headEnd type="none"/>
-            <a:tailEnd type="triangle"/>
-          </a:ln>
-        </p:spPr>
-        <p:txBody>
-          <a:bodyPr/>
-          <a:lstStyle/>
-          <a:p>
-            <a:pPr marL="0" marR="0" lvl="0" indent="0" algn="l" defTabSz="914400" rtl="0" eaLnBrk="1" fontAlgn="auto" latinLnBrk="0" hangingPunct="1">
-              <a:lnSpc>
-                <a:spcPct val="100000"/>
-              </a:lnSpc>
-              <a:spcBef>
-                <a:spcPts val="0"/>
-              </a:spcBef>
-              <a:spcAft>
-                <a:spcPts val="0"/>
-              </a:spcAft>
-              <a:buClrTx/>
-              <a:buSzTx/>
-              <a:buFontTx/>
-              <a:buNone/>
-              <a:tabLst/>
-              <a:defRPr/>
-            </a:pPr>
-            <a:endParaRPr kumimoji="0" lang="en-ZA" sz="1800" b="0" i="0" u="none" strike="noStrike" kern="1200" cap="none" spc="0" normalizeH="0" baseline="0" noProof="0">
-              <a:ln>
-                <a:noFill/>
-              </a:ln>
-              <a:solidFill>
-                <a:prstClr val="black"/>
-              </a:solidFill>
-              <a:effectLst/>
-              <a:uLnTx/>
-              <a:uFillTx/>
-              <a:latin typeface="Calibri" panose="020F0502020204030204"/>
-              <a:ea typeface="+mn-ea"/>
-              <a:cs typeface="+mn-cs"/>
-            </a:endParaRPr>
-          </a:p>
-        </p:txBody>
-      </p:sp>
-      <p:sp>
-        <p:nvSpPr>
-          <p:cNvPr id="25" name="Shape 23"/>
-          <p:cNvSpPr/>
-          <p:nvPr/>
-        </p:nvSpPr>
-        <p:spPr>
-          <a:xfrm>
-            <a:off x="3200400" y="4279392"/>
-            <a:ext cx="3108960" cy="475488"/>
-          </a:xfrm>
-          <a:prstGeom prst="roundRect">
-            <a:avLst>
-              <a:gd name="adj" fmla="val 15385"/>
-            </a:avLst>
-          </a:prstGeom>
-          <a:solidFill>
-            <a:srgbClr val="ECEBF3"/>
-          </a:solidFill>
-          <a:ln w="12700">
-            <a:solidFill>
-              <a:srgbClr val="E5E1EF"/>
-            </a:solidFill>
-            <a:prstDash val="solid"/>
-          </a:ln>
-          <a:effectLst>
-            <a:outerShdw blurRad="76200" dist="25400" dir="8100000" algn="bl" rotWithShape="0">
-              <a:srgbClr val="8A8886">
-                <a:alpha val="28000"/>
-              </a:srgbClr>
-            </a:outerShdw>
-          </a:effectLst>
-        </p:spPr>
-        <p:txBody>
-          <a:bodyPr/>
-          <a:lstStyle/>
-          <a:p>
-            <a:pPr marL="0" marR="0" lvl="0" indent="0" algn="l" defTabSz="914400" rtl="0" eaLnBrk="1" fontAlgn="auto" latinLnBrk="0" hangingPunct="1">
-              <a:lnSpc>
-                <a:spcPct val="100000"/>
-              </a:lnSpc>
-              <a:spcBef>
-                <a:spcPts val="0"/>
-              </a:spcBef>
-              <a:spcAft>
-                <a:spcPts val="0"/>
-              </a:spcAft>
-              <a:buClrTx/>
-              <a:buSzTx/>
-              <a:buFontTx/>
-              <a:buNone/>
-              <a:tabLst/>
-              <a:defRPr/>
-            </a:pPr>
-            <a:endParaRPr kumimoji="0" lang="en-ZA" sz="1800" b="0" i="0" u="none" strike="noStrike" kern="1200" cap="none" spc="0" normalizeH="0" baseline="0" noProof="0">
-              <a:ln>
-                <a:noFill/>
-              </a:ln>
-              <a:solidFill>
-                <a:prstClr val="black"/>
-              </a:solidFill>
-              <a:effectLst/>
-              <a:uLnTx/>
-              <a:uFillTx/>
-              <a:latin typeface="Calibri" panose="020F0502020204030204"/>
-              <a:ea typeface="+mn-ea"/>
-              <a:cs typeface="+mn-cs"/>
-            </a:endParaRPr>
-          </a:p>
-        </p:txBody>
-      </p:sp>
-      <p:sp>
-        <p:nvSpPr>
-          <p:cNvPr id="26" name="Text 24"/>
-          <p:cNvSpPr/>
-          <p:nvPr/>
-        </p:nvSpPr>
-        <p:spPr>
-          <a:xfrm>
-            <a:off x="3246120" y="4279392"/>
-            <a:ext cx="3017520" cy="475488"/>
-          </a:xfrm>
-          <a:prstGeom prst="rect">
-            <a:avLst/>
-          </a:prstGeom>
-          <a:noFill/>
-          <a:ln/>
-        </p:spPr>
-        <p:txBody>
-          <a:bodyPr wrap="square" lIns="25400" tIns="25400" rIns="25400" bIns="25400" rtlCol="0" anchor="ctr"/>
-          <a:lstStyle/>
-          <a:p>
-            <a:pPr marL="0" marR="0" lvl="0" indent="0" algn="ctr" defTabSz="914400" rtl="0" eaLnBrk="1" fontAlgn="auto" latinLnBrk="0" hangingPunct="1">
-              <a:lnSpc>
-                <a:spcPct val="95000"/>
-              </a:lnSpc>
-              <a:spcBef>
-                <a:spcPts val="0"/>
-              </a:spcBef>
-              <a:spcAft>
-                <a:spcPts val="0"/>
-              </a:spcAft>
-              <a:buClrTx/>
-              <a:buSzTx/>
-              <a:buFontTx/>
-              <a:buNone/>
-              <a:tabLst/>
-              <a:defRPr/>
-            </a:pPr>
-            <a:r>
-              <a:rPr kumimoji="0" lang="en-US" sz="1150" b="1" i="0" u="none" strike="noStrike" kern="1200" cap="none" spc="0" normalizeH="0" baseline="0" noProof="0" dirty="0">
-                <a:ln>
-                  <a:noFill/>
-                </a:ln>
-                <a:solidFill>
-                  <a:srgbClr val="242424"/>
-                </a:solidFill>
-                <a:effectLst/>
-                <a:uLnTx/>
-                <a:uFillTx/>
-                <a:latin typeface="Segoe UI" pitchFamily="34" charset="0"/>
-                <a:ea typeface="Segoe UI" pitchFamily="34" charset="-122"/>
-                <a:cs typeface="Segoe UI" pitchFamily="34" charset="-120"/>
-              </a:rPr>
-              <a:t>Entra Agent ID · Purview · Defender</a:t>
-            </a:r>
-            <a:endParaRPr kumimoji="0" lang="en-US" sz="1150" b="0" i="0" u="none" strike="noStrike" kern="1200" cap="none" spc="0" normalizeH="0" baseline="0" noProof="0" dirty="0">
-              <a:ln>
-                <a:noFill/>
-              </a:ln>
-              <a:solidFill>
-                <a:prstClr val="black"/>
-              </a:solidFill>
-              <a:effectLst/>
-              <a:uLnTx/>
-              <a:uFillTx/>
-              <a:latin typeface="Calibri" panose="020F0502020204030204"/>
-              <a:ea typeface="+mn-ea"/>
-              <a:cs typeface="+mn-cs"/>
-            </a:endParaRPr>
-          </a:p>
-        </p:txBody>
-      </p:sp>
-      <p:sp>
-        <p:nvSpPr>
-          <p:cNvPr id="27" name="Shape 25"/>
-          <p:cNvSpPr/>
-          <p:nvPr/>
-        </p:nvSpPr>
-        <p:spPr>
-          <a:xfrm>
-            <a:off x="6720840" y="4279392"/>
-            <a:ext cx="3108960" cy="475488"/>
-          </a:xfrm>
-          <a:prstGeom prst="roundRect">
-            <a:avLst>
-              <a:gd name="adj" fmla="val 15385"/>
-            </a:avLst>
-          </a:prstGeom>
-          <a:solidFill>
-            <a:srgbClr val="ECEBF3"/>
-          </a:solidFill>
-          <a:ln w="12700">
-            <a:solidFill>
-              <a:srgbClr val="E5E1EF"/>
-            </a:solidFill>
-            <a:prstDash val="solid"/>
-          </a:ln>
-          <a:effectLst>
-            <a:outerShdw blurRad="76200" dist="25400" dir="8100000" algn="bl" rotWithShape="0">
-              <a:srgbClr val="8A8886">
-                <a:alpha val="28000"/>
-              </a:srgbClr>
-            </a:outerShdw>
-          </a:effectLst>
-        </p:spPr>
-        <p:txBody>
-          <a:bodyPr/>
-          <a:lstStyle/>
-          <a:p>
-            <a:pPr marL="0" marR="0" lvl="0" indent="0" algn="l" defTabSz="914400" rtl="0" eaLnBrk="1" fontAlgn="auto" latinLnBrk="0" hangingPunct="1">
-              <a:lnSpc>
-                <a:spcPct val="100000"/>
-              </a:lnSpc>
-              <a:spcBef>
-                <a:spcPts val="0"/>
-              </a:spcBef>
-              <a:spcAft>
-                <a:spcPts val="0"/>
-              </a:spcAft>
-              <a:buClrTx/>
-              <a:buSzTx/>
-              <a:buFontTx/>
-              <a:buNone/>
-              <a:tabLst/>
-              <a:defRPr/>
-            </a:pPr>
-            <a:endParaRPr kumimoji="0" lang="en-ZA" sz="1800" b="0" i="0" u="none" strike="noStrike" kern="1200" cap="none" spc="0" normalizeH="0" baseline="0" noProof="0">
-              <a:ln>
-                <a:noFill/>
-              </a:ln>
-              <a:solidFill>
-                <a:prstClr val="black"/>
-              </a:solidFill>
-              <a:effectLst/>
-              <a:uLnTx/>
-              <a:uFillTx/>
-              <a:latin typeface="Calibri" panose="020F0502020204030204"/>
-              <a:ea typeface="+mn-ea"/>
-              <a:cs typeface="+mn-cs"/>
-            </a:endParaRPr>
-          </a:p>
-        </p:txBody>
-      </p:sp>
-      <p:sp>
-        <p:nvSpPr>
-          <p:cNvPr id="28" name="Text 26"/>
-          <p:cNvSpPr/>
-          <p:nvPr/>
-        </p:nvSpPr>
-        <p:spPr>
-          <a:xfrm>
-            <a:off x="6766560" y="4279392"/>
-            <a:ext cx="3017520" cy="475488"/>
-          </a:xfrm>
-          <a:prstGeom prst="rect">
-            <a:avLst/>
-          </a:prstGeom>
-          <a:noFill/>
-          <a:ln/>
-        </p:spPr>
-        <p:txBody>
-          <a:bodyPr wrap="square" lIns="25400" tIns="25400" rIns="25400" bIns="25400" rtlCol="0" anchor="ctr"/>
-          <a:lstStyle/>
-          <a:p>
-            <a:pPr marL="0" marR="0" lvl="0" indent="0" algn="ctr" defTabSz="914400" rtl="0" eaLnBrk="1" fontAlgn="auto" latinLnBrk="0" hangingPunct="1">
-              <a:lnSpc>
-                <a:spcPct val="95000"/>
-              </a:lnSpc>
-              <a:spcBef>
-                <a:spcPts val="0"/>
-              </a:spcBef>
-              <a:spcAft>
-                <a:spcPts val="0"/>
-              </a:spcAft>
-              <a:buClrTx/>
-              <a:buSzTx/>
-              <a:buFontTx/>
-              <a:buNone/>
-              <a:tabLst/>
-              <a:defRPr/>
-            </a:pPr>
-            <a:r>
-              <a:rPr kumimoji="0" lang="en-US" sz="1150" b="1" i="0" u="none" strike="noStrike" kern="1200" cap="none" spc="0" normalizeH="0" baseline="0" noProof="0" dirty="0">
-                <a:ln>
-                  <a:noFill/>
-                </a:ln>
-                <a:solidFill>
-                  <a:srgbClr val="242424"/>
-                </a:solidFill>
-                <a:effectLst/>
-                <a:uLnTx/>
-                <a:uFillTx/>
-                <a:latin typeface="Segoe UI" pitchFamily="34" charset="0"/>
-                <a:ea typeface="Segoe UI" pitchFamily="34" charset="-122"/>
-                <a:cs typeface="Segoe UI" pitchFamily="34" charset="-120"/>
-              </a:rPr>
-              <a:t>cost · completion · time saved · versions</a:t>
-            </a:r>
-            <a:endParaRPr kumimoji="0" lang="en-US" sz="1150" b="0" i="0" u="none" strike="noStrike" kern="1200" cap="none" spc="0" normalizeH="0" baseline="0" noProof="0" dirty="0">
-              <a:ln>
-                <a:noFill/>
-              </a:ln>
-              <a:solidFill>
-                <a:prstClr val="black"/>
-              </a:solidFill>
-              <a:effectLst/>
-              <a:uLnTx/>
-              <a:uFillTx/>
-              <a:latin typeface="Calibri" panose="020F0502020204030204"/>
-              <a:ea typeface="+mn-ea"/>
-              <a:cs typeface="+mn-cs"/>
-            </a:endParaRPr>
-          </a:p>
-        </p:txBody>
-      </p:sp>
-      <p:sp>
-        <p:nvSpPr>
-          <p:cNvPr id="29" name="Shape 27"/>
-          <p:cNvSpPr/>
-          <p:nvPr/>
-        </p:nvSpPr>
-        <p:spPr>
-          <a:xfrm>
-            <a:off x="4754880" y="4069080"/>
-            <a:ext cx="914" cy="210312"/>
-          </a:xfrm>
-          <a:prstGeom prst="line">
-            <a:avLst/>
-          </a:prstGeom>
-          <a:noFill/>
-          <a:ln w="22225">
-            <a:solidFill>
-              <a:srgbClr val="8A8886"/>
-            </a:solidFill>
-            <a:prstDash val="solid"/>
-            <a:headEnd type="none"/>
-            <a:tailEnd type="triangle"/>
-          </a:ln>
-        </p:spPr>
-        <p:txBody>
-          <a:bodyPr/>
-          <a:lstStyle/>
-          <a:p>
-            <a:pPr marL="0" marR="0" lvl="0" indent="0" algn="l" defTabSz="914400" rtl="0" eaLnBrk="1" fontAlgn="auto" latinLnBrk="0" hangingPunct="1">
-              <a:lnSpc>
-                <a:spcPct val="100000"/>
-              </a:lnSpc>
-              <a:spcBef>
-                <a:spcPts val="0"/>
-              </a:spcBef>
-              <a:spcAft>
-                <a:spcPts val="0"/>
-              </a:spcAft>
-              <a:buClrTx/>
-              <a:buSzTx/>
-              <a:buFontTx/>
-              <a:buNone/>
-              <a:tabLst/>
-              <a:defRPr/>
-            </a:pPr>
-            <a:endParaRPr kumimoji="0" lang="en-ZA" sz="1800" b="0" i="0" u="none" strike="noStrike" kern="1200" cap="none" spc="0" normalizeH="0" baseline="0" noProof="0">
-              <a:ln>
-                <a:noFill/>
-              </a:ln>
-              <a:solidFill>
-                <a:prstClr val="black"/>
-              </a:solidFill>
-              <a:effectLst/>
-              <a:uLnTx/>
-              <a:uFillTx/>
-              <a:latin typeface="Calibri" panose="020F0502020204030204"/>
-              <a:ea typeface="+mn-ea"/>
-              <a:cs typeface="+mn-cs"/>
-            </a:endParaRPr>
-          </a:p>
-        </p:txBody>
-      </p:sp>
-      <p:sp>
-        <p:nvSpPr>
-          <p:cNvPr id="30" name="Shape 28"/>
-          <p:cNvSpPr/>
-          <p:nvPr/>
-        </p:nvSpPr>
-        <p:spPr>
-          <a:xfrm>
-            <a:off x="8229600" y="4069080"/>
-            <a:ext cx="914" cy="210312"/>
-          </a:xfrm>
-          <a:prstGeom prst="line">
-            <a:avLst/>
-          </a:prstGeom>
-          <a:noFill/>
-          <a:ln w="22225">
-            <a:solidFill>
-              <a:srgbClr val="8A8886"/>
-            </a:solidFill>
-            <a:prstDash val="solid"/>
-            <a:headEnd type="none"/>
-            <a:tailEnd type="triangle"/>
-          </a:ln>
-        </p:spPr>
-        <p:txBody>
-          <a:bodyPr/>
-          <a:lstStyle/>
-          <a:p>
-            <a:pPr marL="0" marR="0" lvl="0" indent="0" algn="l" defTabSz="914400" rtl="0" eaLnBrk="1" fontAlgn="auto" latinLnBrk="0" hangingPunct="1">
-              <a:lnSpc>
-                <a:spcPct val="100000"/>
-              </a:lnSpc>
-              <a:spcBef>
-                <a:spcPts val="0"/>
-              </a:spcBef>
-              <a:spcAft>
-                <a:spcPts val="0"/>
-              </a:spcAft>
-              <a:buClrTx/>
-              <a:buSzTx/>
-              <a:buFontTx/>
-              <a:buNone/>
-              <a:tabLst/>
-              <a:defRPr/>
-            </a:pPr>
-            <a:endParaRPr kumimoji="0" lang="en-ZA" sz="1800" b="0" i="0" u="none" strike="noStrike" kern="1200" cap="none" spc="0" normalizeH="0" baseline="0" noProof="0">
-              <a:ln>
-                <a:noFill/>
-              </a:ln>
-              <a:solidFill>
-                <a:prstClr val="black"/>
-              </a:solidFill>
-              <a:effectLst/>
-              <a:uLnTx/>
-              <a:uFillTx/>
-              <a:latin typeface="Calibri" panose="020F0502020204030204"/>
-              <a:ea typeface="+mn-ea"/>
-              <a:cs typeface="+mn-cs"/>
-            </a:endParaRPr>
-          </a:p>
-        </p:txBody>
-      </p:sp>
-      <p:sp>
-        <p:nvSpPr>
-          <p:cNvPr id="31" name="Text 29"/>
-          <p:cNvSpPr/>
-          <p:nvPr/>
-        </p:nvSpPr>
-        <p:spPr>
-          <a:xfrm>
-            <a:off x="566928" y="5047488"/>
-            <a:ext cx="8229600" cy="237744"/>
-          </a:xfrm>
-          <a:prstGeom prst="rect">
-            <a:avLst/>
-          </a:prstGeom>
-          <a:noFill/>
-          <a:ln/>
-        </p:spPr>
-        <p:txBody>
-          <a:bodyPr wrap="square" lIns="0" tIns="0" rIns="0" bIns="0" rtlCol="0" anchor="ctr"/>
-          <a:lstStyle/>
-          <a:p>
-            <a:pPr marL="0" marR="0" lvl="0" indent="0" algn="l" defTabSz="914400" rtl="0" eaLnBrk="1" fontAlgn="auto" latinLnBrk="0" hangingPunct="1">
-              <a:lnSpc>
-                <a:spcPct val="100000"/>
-              </a:lnSpc>
-              <a:spcBef>
-                <a:spcPts val="0"/>
-              </a:spcBef>
-              <a:spcAft>
-                <a:spcPts val="0"/>
-              </a:spcAft>
-              <a:buClrTx/>
-              <a:buSzTx/>
-              <a:buFontTx/>
-              <a:buNone/>
-              <a:tabLst/>
-              <a:defRPr/>
-            </a:pPr>
-            <a:r>
-              <a:rPr kumimoji="0" lang="en-US" sz="1050" b="1" i="0" u="none" strike="noStrike" kern="0" cap="none" spc="150" normalizeH="0" baseline="0" noProof="0">
-                <a:ln>
-                  <a:noFill/>
-                </a:ln>
-                <a:solidFill>
-                  <a:srgbClr val="605E5C"/>
-                </a:solidFill>
-                <a:effectLst/>
-                <a:uLnTx/>
-                <a:uFillTx/>
-                <a:latin typeface="Segoe UI Semibold" pitchFamily="34" charset="0"/>
-                <a:ea typeface="Segoe UI Semibold" pitchFamily="34" charset="-122"/>
-                <a:cs typeface="Segoe UI Semibold" pitchFamily="34" charset="-120"/>
-              </a:rPr>
-              <a:t>WHAT FOUNDRY GIVES YOU HERE</a:t>
-            </a:r>
-            <a:endParaRPr kumimoji="0" lang="en-US" sz="1050" b="0" i="0" u="none" strike="noStrike" kern="1200" cap="none" spc="0" normalizeH="0" baseline="0" noProof="0" dirty="0">
-              <a:ln>
-                <a:noFill/>
-              </a:ln>
-              <a:solidFill>
-                <a:prstClr val="black"/>
-              </a:solidFill>
-              <a:effectLst/>
-              <a:uLnTx/>
-              <a:uFillTx/>
-              <a:latin typeface="Calibri" panose="020F0502020204030204"/>
-              <a:ea typeface="+mn-ea"/>
-              <a:cs typeface="+mn-cs"/>
-            </a:endParaRPr>
-          </a:p>
-        </p:txBody>
-      </p:sp>
-      <p:sp>
-        <p:nvSpPr>
-          <p:cNvPr id="32" name="Shape 30"/>
-          <p:cNvSpPr/>
-          <p:nvPr/>
-        </p:nvSpPr>
-        <p:spPr>
-          <a:xfrm>
-            <a:off x="548640" y="5340096"/>
-            <a:ext cx="3538728" cy="932688"/>
-          </a:xfrm>
-          <a:prstGeom prst="roundRect">
-            <a:avLst>
-              <a:gd name="adj" fmla="val 5882"/>
-            </a:avLst>
-          </a:prstGeom>
-          <a:solidFill>
-            <a:srgbClr val="F3F1F8"/>
-          </a:solidFill>
-          <a:ln w="12700">
-            <a:solidFill>
-              <a:srgbClr val="E5E1EF"/>
-            </a:solidFill>
-            <a:prstDash val="solid"/>
-          </a:ln>
-        </p:spPr>
-        <p:txBody>
-          <a:bodyPr/>
-          <a:lstStyle/>
-          <a:p>
-            <a:pPr marL="0" marR="0" lvl="0" indent="0" algn="l" defTabSz="914400" rtl="0" eaLnBrk="1" fontAlgn="auto" latinLnBrk="0" hangingPunct="1">
-              <a:lnSpc>
-                <a:spcPct val="100000"/>
-              </a:lnSpc>
-              <a:spcBef>
-                <a:spcPts val="0"/>
-              </a:spcBef>
-              <a:spcAft>
-                <a:spcPts val="0"/>
-              </a:spcAft>
-              <a:buClrTx/>
-              <a:buSzTx/>
-              <a:buFontTx/>
-              <a:buNone/>
-              <a:tabLst/>
-              <a:defRPr/>
-            </a:pPr>
-            <a:endParaRPr kumimoji="0" lang="en-ZA" sz="1800" b="0" i="0" u="none" strike="noStrike" kern="1200" cap="none" spc="0" normalizeH="0" baseline="0" noProof="0">
-              <a:ln>
-                <a:noFill/>
-              </a:ln>
-              <a:solidFill>
-                <a:prstClr val="black"/>
-              </a:solidFill>
-              <a:effectLst/>
-              <a:uLnTx/>
-              <a:uFillTx/>
-              <a:latin typeface="Calibri" panose="020F0502020204030204"/>
-              <a:ea typeface="+mn-ea"/>
-              <a:cs typeface="+mn-cs"/>
-            </a:endParaRPr>
-          </a:p>
-        </p:txBody>
-      </p:sp>
-      <p:sp>
-        <p:nvSpPr>
-          <p:cNvPr id="33" name="Shape 31"/>
-          <p:cNvSpPr/>
-          <p:nvPr/>
-        </p:nvSpPr>
-        <p:spPr>
-          <a:xfrm>
-            <a:off x="749808" y="5650992"/>
-            <a:ext cx="109728" cy="109728"/>
-          </a:xfrm>
-          <a:prstGeom prst="rect">
-            <a:avLst/>
-          </a:prstGeom>
-          <a:solidFill>
-            <a:srgbClr val="8661C5"/>
-          </a:solidFill>
-          <a:ln/>
-        </p:spPr>
-        <p:txBody>
-          <a:bodyPr/>
-          <a:lstStyle/>
-          <a:p>
-            <a:pPr marL="0" marR="0" lvl="0" indent="0" algn="l" defTabSz="914400" rtl="0" eaLnBrk="1" fontAlgn="auto" latinLnBrk="0" hangingPunct="1">
-              <a:lnSpc>
-                <a:spcPct val="100000"/>
-              </a:lnSpc>
-              <a:spcBef>
-                <a:spcPts val="0"/>
-              </a:spcBef>
-              <a:spcAft>
-                <a:spcPts val="0"/>
-              </a:spcAft>
-              <a:buClrTx/>
-              <a:buSzTx/>
-              <a:buFontTx/>
-              <a:buNone/>
-              <a:tabLst/>
-              <a:defRPr/>
-            </a:pPr>
-            <a:endParaRPr kumimoji="0" lang="en-ZA" sz="1800" b="0" i="0" u="none" strike="noStrike" kern="1200" cap="none" spc="0" normalizeH="0" baseline="0" noProof="0">
-              <a:ln>
-                <a:noFill/>
-              </a:ln>
-              <a:solidFill>
-                <a:prstClr val="black"/>
-              </a:solidFill>
-              <a:effectLst/>
-              <a:uLnTx/>
-              <a:uFillTx/>
-              <a:latin typeface="Calibri" panose="020F0502020204030204"/>
-              <a:ea typeface="+mn-ea"/>
-              <a:cs typeface="+mn-cs"/>
-            </a:endParaRPr>
-          </a:p>
-        </p:txBody>
-      </p:sp>
-      <p:sp>
-        <p:nvSpPr>
-          <p:cNvPr id="34" name="Text 32"/>
-          <p:cNvSpPr/>
-          <p:nvPr/>
-        </p:nvSpPr>
-        <p:spPr>
-          <a:xfrm>
-            <a:off x="950976" y="5340096"/>
-            <a:ext cx="2971800" cy="932688"/>
-          </a:xfrm>
-          <a:prstGeom prst="rect">
-            <a:avLst/>
-          </a:prstGeom>
-          <a:noFill/>
-          <a:ln/>
-        </p:spPr>
-        <p:txBody>
-          <a:bodyPr wrap="square" lIns="0" tIns="0" rIns="0" bIns="0" rtlCol="0" anchor="ctr"/>
-          <a:lstStyle/>
-          <a:p>
-            <a:pPr marL="0" marR="0" lvl="0" indent="0" algn="l" defTabSz="914400" rtl="0" eaLnBrk="1" fontAlgn="auto" latinLnBrk="0" hangingPunct="1">
-              <a:lnSpc>
-                <a:spcPct val="100000"/>
-              </a:lnSpc>
-              <a:spcBef>
-                <a:spcPts val="0"/>
-              </a:spcBef>
-              <a:spcAft>
-                <a:spcPts val="0"/>
-              </a:spcAft>
-              <a:buClrTx/>
-              <a:buSzTx/>
-              <a:buFontTx/>
-              <a:buNone/>
-              <a:tabLst/>
-              <a:defRPr/>
-            </a:pPr>
-            <a:r>
-              <a:rPr kumimoji="0" lang="en-US" sz="1150" b="0" i="0" u="none" strike="noStrike" kern="1200" cap="none" spc="0" normalizeH="0" baseline="0" noProof="0" dirty="0">
-                <a:ln>
-                  <a:noFill/>
-                </a:ln>
-                <a:solidFill>
-                  <a:srgbClr val="242424"/>
-                </a:solidFill>
-                <a:effectLst/>
-                <a:uLnTx/>
-                <a:uFillTx/>
-                <a:latin typeface="Segoe UI" pitchFamily="34" charset="0"/>
-                <a:ea typeface="Segoe UI" pitchFamily="34" charset="-122"/>
-                <a:cs typeface="Segoe UI" pitchFamily="34" charset="-120"/>
-              </a:rPr>
-              <a:t>Agent 365 — org-wide inventory, identity and policy for every agent</a:t>
-            </a:r>
-            <a:endParaRPr kumimoji="0" lang="en-US" sz="1150" b="0" i="0" u="none" strike="noStrike" kern="1200" cap="none" spc="0" normalizeH="0" baseline="0" noProof="0" dirty="0">
-              <a:ln>
-                <a:noFill/>
-              </a:ln>
-              <a:solidFill>
-                <a:prstClr val="black"/>
-              </a:solidFill>
-              <a:effectLst/>
-              <a:uLnTx/>
-              <a:uFillTx/>
-              <a:latin typeface="Calibri" panose="020F0502020204030204"/>
-              <a:ea typeface="+mn-ea"/>
-              <a:cs typeface="+mn-cs"/>
-            </a:endParaRPr>
-          </a:p>
-        </p:txBody>
-      </p:sp>
-      <p:sp>
-        <p:nvSpPr>
-          <p:cNvPr id="35" name="Shape 33"/>
-          <p:cNvSpPr/>
-          <p:nvPr/>
-        </p:nvSpPr>
-        <p:spPr>
-          <a:xfrm>
-            <a:off x="4325112" y="5340096"/>
-            <a:ext cx="3538728" cy="932688"/>
-          </a:xfrm>
-          <a:prstGeom prst="roundRect">
-            <a:avLst>
-              <a:gd name="adj" fmla="val 5882"/>
-            </a:avLst>
-          </a:prstGeom>
-          <a:solidFill>
-            <a:srgbClr val="F3F1F8"/>
-          </a:solidFill>
-          <a:ln w="12700">
-            <a:solidFill>
-              <a:srgbClr val="E5E1EF"/>
-            </a:solidFill>
-            <a:prstDash val="solid"/>
-          </a:ln>
-        </p:spPr>
-        <p:txBody>
-          <a:bodyPr/>
-          <a:lstStyle/>
-          <a:p>
-            <a:pPr marL="0" marR="0" lvl="0" indent="0" algn="l" defTabSz="914400" rtl="0" eaLnBrk="1" fontAlgn="auto" latinLnBrk="0" hangingPunct="1">
-              <a:lnSpc>
-                <a:spcPct val="100000"/>
-              </a:lnSpc>
-              <a:spcBef>
-                <a:spcPts val="0"/>
-              </a:spcBef>
-              <a:spcAft>
-                <a:spcPts val="0"/>
-              </a:spcAft>
-              <a:buClrTx/>
-              <a:buSzTx/>
-              <a:buFontTx/>
-              <a:buNone/>
-              <a:tabLst/>
-              <a:defRPr/>
-            </a:pPr>
-            <a:endParaRPr kumimoji="0" lang="en-ZA" sz="1800" b="0" i="0" u="none" strike="noStrike" kern="1200" cap="none" spc="0" normalizeH="0" baseline="0" noProof="0">
-              <a:ln>
-                <a:noFill/>
-              </a:ln>
-              <a:solidFill>
-                <a:prstClr val="black"/>
-              </a:solidFill>
-              <a:effectLst/>
-              <a:uLnTx/>
-              <a:uFillTx/>
-              <a:latin typeface="Calibri" panose="020F0502020204030204"/>
-              <a:ea typeface="+mn-ea"/>
-              <a:cs typeface="+mn-cs"/>
-            </a:endParaRPr>
-          </a:p>
-        </p:txBody>
-      </p:sp>
-      <p:sp>
-        <p:nvSpPr>
-          <p:cNvPr id="36" name="Shape 34"/>
-          <p:cNvSpPr/>
-          <p:nvPr/>
-        </p:nvSpPr>
-        <p:spPr>
-          <a:xfrm>
-            <a:off x="4526280" y="5650992"/>
-            <a:ext cx="109728" cy="109728"/>
-          </a:xfrm>
-          <a:prstGeom prst="rect">
-            <a:avLst/>
-          </a:prstGeom>
-          <a:solidFill>
-            <a:srgbClr val="8661C5"/>
-          </a:solidFill>
-          <a:ln/>
-        </p:spPr>
-        <p:txBody>
-          <a:bodyPr/>
-          <a:lstStyle/>
-          <a:p>
-            <a:pPr marL="0" marR="0" lvl="0" indent="0" algn="l" defTabSz="914400" rtl="0" eaLnBrk="1" fontAlgn="auto" latinLnBrk="0" hangingPunct="1">
-              <a:lnSpc>
-                <a:spcPct val="100000"/>
-              </a:lnSpc>
-              <a:spcBef>
-                <a:spcPts val="0"/>
-              </a:spcBef>
-              <a:spcAft>
-                <a:spcPts val="0"/>
-              </a:spcAft>
-              <a:buClrTx/>
-              <a:buSzTx/>
-              <a:buFontTx/>
-              <a:buNone/>
-              <a:tabLst/>
-              <a:defRPr/>
-            </a:pPr>
-            <a:endParaRPr kumimoji="0" lang="en-ZA" sz="1800" b="0" i="0" u="none" strike="noStrike" kern="1200" cap="none" spc="0" normalizeH="0" baseline="0" noProof="0">
-              <a:ln>
-                <a:noFill/>
-              </a:ln>
-              <a:solidFill>
-                <a:prstClr val="black"/>
-              </a:solidFill>
-              <a:effectLst/>
-              <a:uLnTx/>
-              <a:uFillTx/>
-              <a:latin typeface="Calibri" panose="020F0502020204030204"/>
-              <a:ea typeface="+mn-ea"/>
-              <a:cs typeface="+mn-cs"/>
-            </a:endParaRPr>
-          </a:p>
-        </p:txBody>
-      </p:sp>
-      <p:sp>
-        <p:nvSpPr>
-          <p:cNvPr id="37" name="Text 35"/>
-          <p:cNvSpPr/>
-          <p:nvPr/>
-        </p:nvSpPr>
-        <p:spPr>
-          <a:xfrm>
-            <a:off x="4727448" y="5340096"/>
-            <a:ext cx="2971800" cy="932688"/>
-          </a:xfrm>
-          <a:prstGeom prst="rect">
-            <a:avLst/>
-          </a:prstGeom>
-          <a:noFill/>
-          <a:ln/>
-        </p:spPr>
-        <p:txBody>
-          <a:bodyPr wrap="square" lIns="0" tIns="0" rIns="0" bIns="0" rtlCol="0" anchor="ctr"/>
-          <a:lstStyle/>
-          <a:p>
-            <a:pPr marL="0" marR="0" lvl="0" indent="0" algn="l" defTabSz="914400" rtl="0" eaLnBrk="1" fontAlgn="auto" latinLnBrk="0" hangingPunct="1">
-              <a:lnSpc>
-                <a:spcPct val="100000"/>
-              </a:lnSpc>
-              <a:spcBef>
-                <a:spcPts val="0"/>
-              </a:spcBef>
-              <a:spcAft>
-                <a:spcPts val="0"/>
-              </a:spcAft>
-              <a:buClrTx/>
-              <a:buSzTx/>
-              <a:buFontTx/>
-              <a:buNone/>
-              <a:tabLst/>
-              <a:defRPr/>
-            </a:pPr>
-            <a:r>
-              <a:rPr kumimoji="0" lang="en-US" sz="1150" b="0" i="0" u="none" strike="noStrike" kern="1200" cap="none" spc="0" normalizeH="0" baseline="0" noProof="0" dirty="0">
-                <a:ln>
-                  <a:noFill/>
-                </a:ln>
-                <a:solidFill>
-                  <a:srgbClr val="242424"/>
-                </a:solidFill>
-                <a:effectLst/>
-                <a:uLnTx/>
-                <a:uFillTx/>
-                <a:latin typeface="Segoe UI" pitchFamily="34" charset="0"/>
-                <a:ea typeface="Segoe UI" pitchFamily="34" charset="-122"/>
-                <a:cs typeface="Segoe UI" pitchFamily="34" charset="-120"/>
-              </a:rPr>
-              <a:t>ROI for agents — connects operating cost to task completion, time saved, value</a:t>
-            </a:r>
-            <a:endParaRPr kumimoji="0" lang="en-US" sz="1150" b="0" i="0" u="none" strike="noStrike" kern="1200" cap="none" spc="0" normalizeH="0" baseline="0" noProof="0" dirty="0">
-              <a:ln>
-                <a:noFill/>
-              </a:ln>
-              <a:solidFill>
-                <a:prstClr val="black"/>
-              </a:solidFill>
-              <a:effectLst/>
-              <a:uLnTx/>
-              <a:uFillTx/>
-              <a:latin typeface="Calibri" panose="020F0502020204030204"/>
-              <a:ea typeface="+mn-ea"/>
-              <a:cs typeface="+mn-cs"/>
-            </a:endParaRPr>
-          </a:p>
-        </p:txBody>
-      </p:sp>
-      <p:sp>
-        <p:nvSpPr>
-          <p:cNvPr id="38" name="Shape 36"/>
-          <p:cNvSpPr/>
-          <p:nvPr/>
-        </p:nvSpPr>
-        <p:spPr>
-          <a:xfrm>
-            <a:off x="8101584" y="5340096"/>
-            <a:ext cx="3538728" cy="932688"/>
-          </a:xfrm>
-          <a:prstGeom prst="roundRect">
-            <a:avLst>
-              <a:gd name="adj" fmla="val 5882"/>
-            </a:avLst>
-          </a:prstGeom>
-          <a:solidFill>
-            <a:srgbClr val="F3F1F8"/>
-          </a:solidFill>
-          <a:ln w="12700">
-            <a:solidFill>
-              <a:srgbClr val="E5E1EF"/>
-            </a:solidFill>
-            <a:prstDash val="solid"/>
-          </a:ln>
-        </p:spPr>
-        <p:txBody>
-          <a:bodyPr/>
-          <a:lstStyle/>
-          <a:p>
-            <a:pPr marL="0" marR="0" lvl="0" indent="0" algn="l" defTabSz="914400" rtl="0" eaLnBrk="1" fontAlgn="auto" latinLnBrk="0" hangingPunct="1">
-              <a:lnSpc>
-                <a:spcPct val="100000"/>
-              </a:lnSpc>
-              <a:spcBef>
-                <a:spcPts val="0"/>
-              </a:spcBef>
-              <a:spcAft>
-                <a:spcPts val="0"/>
-              </a:spcAft>
-              <a:buClrTx/>
-              <a:buSzTx/>
-              <a:buFontTx/>
-              <a:buNone/>
-              <a:tabLst/>
-              <a:defRPr/>
-            </a:pPr>
-            <a:endParaRPr kumimoji="0" lang="en-ZA" sz="1800" b="0" i="0" u="none" strike="noStrike" kern="1200" cap="none" spc="0" normalizeH="0" baseline="0" noProof="0">
-              <a:ln>
-                <a:noFill/>
-              </a:ln>
-              <a:solidFill>
-                <a:prstClr val="black"/>
-              </a:solidFill>
-              <a:effectLst/>
-              <a:uLnTx/>
-              <a:uFillTx/>
-              <a:latin typeface="Calibri" panose="020F0502020204030204"/>
-              <a:ea typeface="+mn-ea"/>
-              <a:cs typeface="+mn-cs"/>
-            </a:endParaRPr>
-          </a:p>
-        </p:txBody>
-      </p:sp>
-      <p:sp>
-        <p:nvSpPr>
-          <p:cNvPr id="39" name="Shape 37"/>
-          <p:cNvSpPr/>
-          <p:nvPr/>
-        </p:nvSpPr>
-        <p:spPr>
-          <a:xfrm>
-            <a:off x="8302752" y="5650992"/>
-            <a:ext cx="109728" cy="109728"/>
-          </a:xfrm>
-          <a:prstGeom prst="rect">
-            <a:avLst/>
-          </a:prstGeom>
-          <a:solidFill>
-            <a:srgbClr val="8661C5"/>
-          </a:solidFill>
-          <a:ln/>
-        </p:spPr>
-        <p:txBody>
-          <a:bodyPr/>
-          <a:lstStyle/>
-          <a:p>
-            <a:pPr marL="0" marR="0" lvl="0" indent="0" algn="l" defTabSz="914400" rtl="0" eaLnBrk="1" fontAlgn="auto" latinLnBrk="0" hangingPunct="1">
-              <a:lnSpc>
-                <a:spcPct val="100000"/>
-              </a:lnSpc>
-              <a:spcBef>
-                <a:spcPts val="0"/>
-              </a:spcBef>
-              <a:spcAft>
-                <a:spcPts val="0"/>
-              </a:spcAft>
-              <a:buClrTx/>
-              <a:buSzTx/>
-              <a:buFontTx/>
-              <a:buNone/>
-              <a:tabLst/>
-              <a:defRPr/>
-            </a:pPr>
-            <a:endParaRPr kumimoji="0" lang="en-ZA" sz="1800" b="0" i="0" u="none" strike="noStrike" kern="1200" cap="none" spc="0" normalizeH="0" baseline="0" noProof="0">
-              <a:ln>
-                <a:noFill/>
-              </a:ln>
-              <a:solidFill>
-                <a:prstClr val="black"/>
-              </a:solidFill>
-              <a:effectLst/>
-              <a:uLnTx/>
-              <a:uFillTx/>
-              <a:latin typeface="Calibri" panose="020F0502020204030204"/>
-              <a:ea typeface="+mn-ea"/>
-              <a:cs typeface="+mn-cs"/>
-            </a:endParaRPr>
-          </a:p>
-        </p:txBody>
-      </p:sp>
-      <p:sp>
-        <p:nvSpPr>
-          <p:cNvPr id="40" name="Text 38"/>
-          <p:cNvSpPr/>
-          <p:nvPr/>
-        </p:nvSpPr>
-        <p:spPr>
-          <a:xfrm>
-            <a:off x="8503920" y="5340096"/>
-            <a:ext cx="2971800" cy="932688"/>
-          </a:xfrm>
-          <a:prstGeom prst="rect">
-            <a:avLst/>
-          </a:prstGeom>
-          <a:noFill/>
-          <a:ln/>
-        </p:spPr>
-        <p:txBody>
-          <a:bodyPr wrap="square" lIns="0" tIns="0" rIns="0" bIns="0" rtlCol="0" anchor="ctr"/>
-          <a:lstStyle/>
-          <a:p>
-            <a:pPr marL="0" marR="0" lvl="0" indent="0" algn="l" defTabSz="914400" rtl="0" eaLnBrk="1" fontAlgn="auto" latinLnBrk="0" hangingPunct="1">
-              <a:lnSpc>
-                <a:spcPct val="100000"/>
-              </a:lnSpc>
-              <a:spcBef>
-                <a:spcPts val="0"/>
-              </a:spcBef>
-              <a:spcAft>
-                <a:spcPts val="0"/>
-              </a:spcAft>
-              <a:buClrTx/>
-              <a:buSzTx/>
-              <a:buFontTx/>
-              <a:buNone/>
-              <a:tabLst/>
-              <a:defRPr/>
-            </a:pPr>
-            <a:r>
-              <a:rPr kumimoji="0" lang="en-US" sz="1150" b="0" i="0" u="none" strike="noStrike" kern="1200" cap="none" spc="0" normalizeH="0" baseline="0" noProof="0" dirty="0">
-                <a:ln>
-                  <a:noFill/>
-                </a:ln>
-                <a:solidFill>
-                  <a:srgbClr val="242424"/>
-                </a:solidFill>
-                <a:effectLst/>
-                <a:uLnTx/>
-                <a:uFillTx/>
-                <a:latin typeface="Segoe UI" pitchFamily="34" charset="0"/>
-                <a:ea typeface="Segoe UI" pitchFamily="34" charset="-122"/>
-                <a:cs typeface="Segoe UI" pitchFamily="34" charset="-120"/>
-              </a:rPr>
-              <a:t>Compare versions, monitor trends, investigate weak traces</a:t>
-            </a:r>
-            <a:endParaRPr kumimoji="0" lang="en-US" sz="1150" b="0" i="0" u="none" strike="noStrike" kern="1200" cap="none" spc="0" normalizeH="0" baseline="0" noProof="0" dirty="0">
-              <a:ln>
-                <a:noFill/>
-              </a:ln>
-              <a:solidFill>
-                <a:prstClr val="black"/>
-              </a:solidFill>
-              <a:effectLst/>
-              <a:uLnTx/>
-              <a:uFillTx/>
-              <a:latin typeface="Calibri" panose="020F0502020204030204"/>
-              <a:ea typeface="+mn-ea"/>
-              <a:cs typeface="+mn-cs"/>
-            </a:endParaRPr>
-          </a:p>
-        </p:txBody>
-      </p:sp>
-      <p:sp>
-        <p:nvSpPr>
-          <p:cNvPr id="41" name="Shape 39"/>
-          <p:cNvSpPr/>
-          <p:nvPr/>
-        </p:nvSpPr>
-        <p:spPr>
-          <a:xfrm>
-            <a:off x="566928" y="6400800"/>
-            <a:ext cx="11064240" cy="0"/>
-          </a:xfrm>
-          <a:prstGeom prst="line">
-            <a:avLst/>
-          </a:prstGeom>
-          <a:noFill/>
-          <a:ln w="12700">
-            <a:solidFill>
-              <a:srgbClr val="8661C5"/>
-            </a:solidFill>
-            <a:prstDash val="solid"/>
-          </a:ln>
-        </p:spPr>
-        <p:txBody>
-          <a:bodyPr/>
-          <a:lstStyle/>
-          <a:p>
-            <a:pPr marL="0" marR="0" lvl="0" indent="0" algn="l" defTabSz="914400" rtl="0" eaLnBrk="1" fontAlgn="auto" latinLnBrk="0" hangingPunct="1">
-              <a:lnSpc>
-                <a:spcPct val="100000"/>
-              </a:lnSpc>
-              <a:spcBef>
-                <a:spcPts val="0"/>
-              </a:spcBef>
-              <a:spcAft>
-                <a:spcPts val="0"/>
-              </a:spcAft>
-              <a:buClrTx/>
-              <a:buSzTx/>
-              <a:buFontTx/>
-              <a:buNone/>
-              <a:tabLst/>
-              <a:defRPr/>
-            </a:pPr>
-            <a:endParaRPr kumimoji="0" lang="en-ZA" sz="1800" b="0" i="0" u="none" strike="noStrike" kern="1200" cap="none" spc="0" normalizeH="0" baseline="0" noProof="0">
-              <a:ln>
-                <a:noFill/>
-              </a:ln>
-              <a:solidFill>
-                <a:prstClr val="black"/>
-              </a:solidFill>
-              <a:effectLst/>
-              <a:uLnTx/>
-              <a:uFillTx/>
-              <a:latin typeface="Calibri" panose="020F0502020204030204"/>
-              <a:ea typeface="+mn-ea"/>
-              <a:cs typeface="+mn-cs"/>
-            </a:endParaRPr>
-          </a:p>
-        </p:txBody>
-      </p:sp>
-      <p:sp>
-        <p:nvSpPr>
-          <p:cNvPr id="42" name="Text 40"/>
-          <p:cNvSpPr/>
-          <p:nvPr/>
-        </p:nvSpPr>
-        <p:spPr>
-          <a:xfrm>
-            <a:off x="566928" y="6455664"/>
-            <a:ext cx="9601200" cy="256032"/>
-          </a:xfrm>
-          <a:prstGeom prst="rect">
-            <a:avLst/>
-          </a:prstGeom>
-          <a:noFill/>
-          <a:ln/>
-        </p:spPr>
-        <p:txBody>
-          <a:bodyPr wrap="square" lIns="0" tIns="0" rIns="0" bIns="0" rtlCol="0" anchor="ctr"/>
-          <a:lstStyle/>
-          <a:p>
-            <a:pPr marL="0" marR="0" lvl="0" indent="0" algn="l" defTabSz="914400" rtl="0" eaLnBrk="1" fontAlgn="auto" latinLnBrk="0" hangingPunct="1">
-              <a:lnSpc>
-                <a:spcPct val="100000"/>
-              </a:lnSpc>
-              <a:spcBef>
-                <a:spcPts val="0"/>
-              </a:spcBef>
-              <a:spcAft>
-                <a:spcPts val="0"/>
-              </a:spcAft>
-              <a:buClrTx/>
-              <a:buSzTx/>
-              <a:buFontTx/>
-              <a:buNone/>
-              <a:tabLst/>
-              <a:defRPr/>
-            </a:pPr>
-            <a:r>
-              <a:rPr kumimoji="0" lang="en-US" sz="900" b="0" i="0" u="none" strike="noStrike" kern="1200" cap="none" spc="0" normalizeH="0" baseline="0" noProof="0" dirty="0">
-                <a:ln>
-                  <a:noFill/>
-                </a:ln>
-                <a:solidFill>
-                  <a:srgbClr val="5C6B9A"/>
-                </a:solidFill>
-                <a:effectLst/>
-                <a:uLnTx/>
-                <a:uFillTx/>
-                <a:latin typeface="Segoe UI" pitchFamily="34" charset="0"/>
-                <a:ea typeface="Segoe UI" pitchFamily="34" charset="-122"/>
-                <a:cs typeface="Segoe UI" pitchFamily="34" charset="-120"/>
-              </a:rPr>
-              <a:t>Microsoft Foundry Patterns  ·  subject to change</a:t>
-            </a:r>
-            <a:endParaRPr kumimoji="0" lang="en-US" sz="900" b="0" i="0" u="none" strike="noStrike" kern="1200" cap="none" spc="0" normalizeH="0" baseline="0" noProof="0" dirty="0">
-              <a:ln>
-                <a:noFill/>
-              </a:ln>
-              <a:solidFill>
-                <a:prstClr val="black"/>
-              </a:solidFill>
-              <a:effectLst/>
-              <a:uLnTx/>
-              <a:uFillTx/>
-              <a:latin typeface="Calibri" panose="020F0502020204030204"/>
-              <a:ea typeface="+mn-ea"/>
-              <a:cs typeface="+mn-cs"/>
-            </a:endParaRPr>
-          </a:p>
-        </p:txBody>
-      </p:sp>
-      <p:sp>
-        <p:nvSpPr>
-          <p:cNvPr id="43" name="Text 41"/>
-          <p:cNvSpPr/>
-          <p:nvPr/>
-        </p:nvSpPr>
-        <p:spPr>
-          <a:xfrm>
-            <a:off x="11155680" y="6455664"/>
-            <a:ext cx="457200" cy="256032"/>
-          </a:xfrm>
-          <a:prstGeom prst="rect">
-            <a:avLst/>
-          </a:prstGeom>
-          <a:noFill/>
-          <a:ln/>
-        </p:spPr>
-        <p:txBody>
-          <a:bodyPr wrap="square" lIns="0" tIns="0" rIns="0" bIns="0" rtlCol="0" anchor="ctr"/>
-          <a:lstStyle/>
-          <a:p>
-            <a:pPr marL="0" marR="0" lvl="0" indent="0" algn="r" defTabSz="914400" rtl="0" eaLnBrk="1" fontAlgn="auto" latinLnBrk="0" hangingPunct="1">
-              <a:lnSpc>
-                <a:spcPct val="100000"/>
-              </a:lnSpc>
-              <a:spcBef>
-                <a:spcPts val="0"/>
-              </a:spcBef>
-              <a:spcAft>
-                <a:spcPts val="0"/>
-              </a:spcAft>
-              <a:buClrTx/>
-              <a:buSzTx/>
-              <a:buFontTx/>
-              <a:buNone/>
-              <a:tabLst/>
-              <a:defRPr/>
-            </a:pPr>
-            <a:r>
-              <a:rPr kumimoji="0" lang="en-US" sz="900" b="0" i="0" u="none" strike="noStrike" kern="1200" cap="none" spc="0" normalizeH="0" baseline="0" noProof="0">
-                <a:ln>
-                  <a:noFill/>
-                </a:ln>
-                <a:solidFill>
-                  <a:srgbClr val="5C6B9A"/>
-                </a:solidFill>
-                <a:effectLst/>
-                <a:uLnTx/>
-                <a:uFillTx/>
-                <a:latin typeface="Segoe UI" pitchFamily="34" charset="0"/>
-                <a:ea typeface="Segoe UI" pitchFamily="34" charset="-122"/>
-                <a:cs typeface="Segoe UI" pitchFamily="34" charset="-120"/>
-              </a:rPr>
-              <a:t>20</a:t>
             </a:r>
             <a:endParaRPr kumimoji="0" lang="en-US" sz="900" b="0" i="0" u="none" strike="noStrike" kern="1200" cap="none" spc="0" normalizeH="0" baseline="0" noProof="0" dirty="0">
               <a:ln>
@@ -36730,7 +33568,7 @@
                           <a:ea typeface="Segoe UI" pitchFamily="34" charset="-122"/>
                           <a:cs typeface="Segoe UI" pitchFamily="34" charset="-120"/>
                         </a:rPr>
-                        <a:t>Governance / Prompt Shields / Content Safety</a:t>
+                        <a:t>Governance (Prompt Shields + Content Safety)</a:t>
                       </a:r>
                       <a:endParaRPr lang="en-US" sz="1200" dirty="0">
                         <a:latin typeface="Segoe UI" charset="0"/>
@@ -37003,7 +33841,7 @@
                           <a:ea typeface="Segoe UI" pitchFamily="34" charset="-122"/>
                           <a:cs typeface="Segoe UI" pitchFamily="34" charset="-120"/>
                         </a:rPr>
-                        <a:t>Agent Service</a:t>
+                        <a:t>Agent Service (prompt and hosted agent)</a:t>
                       </a:r>
                       <a:endParaRPr lang="en-US" sz="1200" dirty="0">
                         <a:latin typeface="Segoe UI" charset="0"/>
@@ -37295,7 +34133,7 @@
                           <a:ea typeface="Segoe UI" pitchFamily="34" charset="-122"/>
                           <a:cs typeface="Segoe UI" pitchFamily="34" charset="-120"/>
                         </a:rPr>
-                        <a:t>Centralized Toolboxes</a:t>
+                        <a:t>Centralized Toolboxes (one governed MCP endpoint)</a:t>
                       </a:r>
                       <a:endParaRPr lang="en-US" sz="1200" dirty="0">
                         <a:latin typeface="Segoe UI" charset="0"/>
@@ -37438,7 +34276,7 @@
                           <a:ea typeface="Segoe UI" charset="0"/>
                           <a:cs typeface="Segoe UI" charset="0"/>
                         </a:rPr>
-                        <a:t>Agentic Loop (Build Skills, Not Agents)</a:t>
+                        <a:t>Agentic Loop (build skills, not agents)</a:t>
                       </a:r>
                       <a:endParaRPr lang="en-US" sz="1200" dirty="0">
                         <a:latin typeface="Segoe UI" charset="0"/>
@@ -37581,7 +34419,7 @@
                           <a:ea typeface="Segoe UI" charset="0"/>
                           <a:cs typeface="Segoe UI" charset="0"/>
                         </a:rPr>
-                        <a:t>Memory (Short-term &amp; Long-term)</a:t>
+                        <a:t>Memory (short-term + long-term)</a:t>
                       </a:r>
                       <a:endParaRPr lang="en-US" sz="1200" dirty="0">
                         <a:latin typeface="Segoe UI" charset="0"/>
@@ -38036,7 +34874,7 @@
                           <a:ea typeface="Segoe UI" pitchFamily="34" charset="-122"/>
                           <a:cs typeface="Segoe UI" pitchFamily="34" charset="-120"/>
                         </a:rPr>
-                        <a:t>Multi-agent (Agent Framework)</a:t>
+                        <a:t>Multi-agent orchestration (Agent Framework)</a:t>
                       </a:r>
                       <a:endParaRPr lang="en-US" sz="1200" dirty="0">
                         <a:latin typeface="Segoe UI" charset="0"/>
@@ -38744,7 +35582,7 @@
                           <a:ea typeface="Segoe UI" charset="0"/>
                           <a:cs typeface="Segoe UI" charset="0"/>
                         </a:rPr>
-                        <a:t>Caching &amp; Cost</a:t>
+                        <a:t>Cost &amp; latency (prompt cache + Model Router)</a:t>
                       </a:r>
                       <a:endParaRPr lang="en-US" sz="1200" dirty="0">
                         <a:latin typeface="Segoe UI" charset="0"/>
@@ -38801,149 +35639,6 @@
                   </a:ext>
                 </a:extLst>
               </a:tr>
-              <a:tr h="419100">
-                <a:tc>
-                  <a:txBody>
-                    <a:bodyPr/>
-                    <a:lstStyle/>
-                    <a:p>
-                      <a:pPr marL="0" indent="0" algn="ctr">
-                        <a:buNone/>
-                      </a:pPr>
-                      <a:r>
-                        <a:rPr lang="en-US" sz="1200" b="1">
-                          <a:solidFill>
-                            <a:srgbClr val="7854A3"/>
-                          </a:solidFill>
-                          <a:latin typeface="Segoe UI" charset="0"/>
-                          <a:ea typeface="Segoe UI" charset="0"/>
-                          <a:cs typeface="Segoe UI" charset="0"/>
-                        </a:rPr>
-                        <a:t>12</a:t>
-                      </a:r>
-                      <a:endParaRPr lang="en-US" sz="1200" b="1" dirty="0">
-                        <a:solidFill>
-                          <a:srgbClr val="7854A3"/>
-                        </a:solidFill>
-                        <a:latin typeface="Segoe UI" charset="0"/>
-                        <a:ea typeface="Segoe UI" charset="0"/>
-                        <a:cs typeface="Segoe UI" charset="0"/>
-                      </a:endParaRPr>
-                    </a:p>
-                  </a:txBody>
-                  <a:tcPr anchor="ctr">
-                    <a:lnL w="6350" cap="flat" cmpd="sng" algn="ctr">
-                      <a:solidFill>
-                        <a:srgbClr val="E5E1EF"/>
-                      </a:solidFill>
-                      <a:prstDash val="solid"/>
-                      <a:round/>
-                      <a:headEnd type="none" w="med" len="med"/>
-                      <a:tailEnd type="none" w="med" len="med"/>
-                    </a:lnL>
-                    <a:lnR w="6350" cap="flat" cmpd="sng" algn="ctr">
-                      <a:solidFill>
-                        <a:srgbClr val="E5E1EF"/>
-                      </a:solidFill>
-                      <a:prstDash val="solid"/>
-                      <a:round/>
-                      <a:headEnd type="none" w="med" len="med"/>
-                      <a:tailEnd type="none" w="med" len="med"/>
-                    </a:lnR>
-                    <a:lnT w="6350" cap="flat" cmpd="sng" algn="ctr">
-                      <a:solidFill>
-                        <a:srgbClr val="E5E1EF"/>
-                      </a:solidFill>
-                      <a:prstDash val="solid"/>
-                      <a:round/>
-                      <a:headEnd type="none" w="med" len="med"/>
-                      <a:tailEnd type="none" w="med" len="med"/>
-                    </a:lnT>
-                    <a:lnB w="6350" cap="flat" cmpd="sng" algn="ctr">
-                      <a:solidFill>
-                        <a:srgbClr val="E5E1EF"/>
-                      </a:solidFill>
-                      <a:prstDash val="solid"/>
-                      <a:round/>
-                      <a:headEnd type="none" w="med" len="med"/>
-                      <a:tailEnd type="none" w="med" len="med"/>
-                    </a:lnB>
-                    <a:solidFill>
-                      <a:srgbClr val="F3F1F8"/>
-                    </a:solidFill>
-                  </a:tcPr>
-                </a:tc>
-                <a:tc>
-                  <a:txBody>
-                    <a:bodyPr/>
-                    <a:lstStyle/>
-                    <a:p>
-                      <a:pPr marL="0" indent="0" algn="l">
-                        <a:buNone/>
-                      </a:pPr>
-                      <a:r>
-                        <a:rPr lang="en-US" sz="1200">
-                          <a:latin typeface="Segoe UI" charset="0"/>
-                          <a:ea typeface="Segoe UI" charset="0"/>
-                          <a:cs typeface="Segoe UI" charset="0"/>
-                        </a:rPr>
-                        <a:t>Agent 365 &amp; ROI</a:t>
-                      </a:r>
-                      <a:endParaRPr lang="en-US" sz="1200" dirty="0">
-                        <a:latin typeface="Segoe UI" charset="0"/>
-                        <a:ea typeface="Segoe UI" charset="0"/>
-                        <a:cs typeface="Segoe UI" charset="0"/>
-                      </a:endParaRPr>
-                    </a:p>
-                  </a:txBody>
-                  <a:tcPr anchor="ctr">
-                    <a:lnL w="6350" cap="flat" cmpd="sng" algn="ctr">
-                      <a:solidFill>
-                        <a:srgbClr val="E5E1EF"/>
-                      </a:solidFill>
-                      <a:prstDash val="solid"/>
-                      <a:round/>
-                      <a:headEnd type="none" w="med" len="med"/>
-                      <a:tailEnd type="none" w="med" len="med"/>
-                    </a:lnL>
-                    <a:lnR w="6350" cap="flat" cmpd="sng" algn="ctr">
-                      <a:solidFill>
-                        <a:srgbClr val="E5E1EF"/>
-                      </a:solidFill>
-                      <a:prstDash val="solid"/>
-                      <a:round/>
-                      <a:headEnd type="none" w="med" len="med"/>
-                      <a:tailEnd type="none" w="med" len="med"/>
-                    </a:lnR>
-                    <a:lnT w="6350" cap="flat" cmpd="sng" algn="ctr">
-                      <a:solidFill>
-                        <a:srgbClr val="E5E1EF"/>
-                      </a:solidFill>
-                      <a:prstDash val="solid"/>
-                      <a:round/>
-                      <a:headEnd type="none" w="med" len="med"/>
-                      <a:tailEnd type="none" w="med" len="med"/>
-                    </a:lnT>
-                    <a:lnB w="6350" cap="flat" cmpd="sng" algn="ctr">
-                      <a:solidFill>
-                        <a:srgbClr val="E5E1EF"/>
-                      </a:solidFill>
-                      <a:prstDash val="solid"/>
-                      <a:round/>
-                      <a:headEnd type="none" w="med" len="med"/>
-                      <a:tailEnd type="none" w="med" len="med"/>
-                    </a:lnB>
-                    <a:solidFill>
-                      <a:srgbClr val="F3F1F8"/>
-                    </a:solidFill>
-                  </a:tcPr>
-                </a:tc>
-                <a:extLst>
-                  <a:ext uri="{0D108BD9-81ED-4DB2-BD59-A6C34878D82A}">
-                    <a16:rowId xmlns:a16="http://schemas.microsoft.com/office/drawing/2014/main" val="3284413241"/>
-                  </a:ext>
-                </a:extLst>
-              </a:tr>
             </a:tbl>
           </a:graphicData>
         </a:graphic>
@@ -39001,7 +35696,7 @@
                 <a:ea typeface="Segoe UI" pitchFamily="34" charset="-122"/>
                 <a:cs typeface="Segoe UI" pitchFamily="34" charset="-120"/>
               </a:rPr>
-              <a:t>Thirteen patterns in four groups. One slide, one live demo each.</a:t>
+              <a:t>Twelve patterns in four groups. One slide, one live demo each.</a:t>
             </a:r>
             <a:endParaRPr kumimoji="0" lang="en-US" sz="1200" b="0" i="0" u="none" strike="noStrike" kern="1200" cap="none" spc="0" normalizeH="0" baseline="0" noProof="0" dirty="0">
               <a:ln>
@@ -43410,7 +40105,7 @@
                 <a:ea typeface="Segoe UI Semibold" pitchFamily="34" charset="-122"/>
                 <a:cs typeface="Segoe UI Semibold" pitchFamily="34" charset="-120"/>
               </a:rPr>
-              <a:t>Governance / Prompt Shields / Content Safety</a:t>
+              <a:t>Governance (Prompt Shields + Content Safety)</a:t>
             </a:r>
             <a:endParaRPr kumimoji="0" lang="en-US" sz="2500" b="0" i="0" u="none" strike="noStrike" kern="1200" cap="none" spc="0" normalizeH="0" baseline="0" noProof="0" dirty="0">
               <a:ln>
@@ -47101,7 +43796,7 @@
                 <a:ea typeface="Segoe UI Semibold" pitchFamily="34" charset="-122"/>
                 <a:cs typeface="Segoe UI Semibold" pitchFamily="34" charset="-120"/>
               </a:rPr>
-              <a:t>Agent Service</a:t>
+              <a:t>Agent Service (prompt and hosted agent)</a:t>
             </a:r>
             <a:endParaRPr kumimoji="0" lang="en-US" sz="2500" b="0" i="0" u="none" strike="noStrike" kern="1200" cap="none" spc="0" normalizeH="0" baseline="0" noProof="0" dirty="0">
               <a:ln>

--- a/foundry-patterns.pptx
+++ b/foundry-patterns.pptx
@@ -5011,7 +5011,7 @@
                 <a:ea typeface="Segoe UI Semibold" pitchFamily="34" charset="-122"/>
                 <a:cs typeface="Segoe UI Semibold" pitchFamily="34" charset="-120"/>
               </a:rPr>
-              <a:t>13</a:t>
+              <a:t>12</a:t>
             </a:r>
             <a:endParaRPr kumimoji="0" lang="en-US" sz="4600" b="0" i="0" u="none" strike="noStrike" kern="1200" cap="none" spc="0" normalizeH="0" baseline="0" noProof="0" dirty="0">
               <a:ln>
@@ -31681,7 +31681,7 @@
 </p:sld>
 </file>
 
-<file path=ppt/slides/slide21.xml><?xml version="1.0" encoding="utf-8"?>
+<file path=ppt/slides/slide20.xml><?xml version="1.0" encoding="utf-8"?>
 <p:sld xmlns:a="http://schemas.openxmlformats.org/drawingml/2006/main" xmlns:r="http://schemas.openxmlformats.org/officeDocument/2006/relationships" xmlns:p="http://schemas.openxmlformats.org/presentationml/2006/main">
   <p:cSld>
     <p:bg>
@@ -34062,7 +34062,7 @@
                           <a:ea typeface="Segoe UI" pitchFamily="34" charset="-122"/>
                           <a:cs typeface="Segoe UI" pitchFamily="34" charset="-120"/>
                         </a:rPr>
-                        <a:t>13</a:t>
+                        <a:t>12</a:t>
                       </a:r>
                       <a:endParaRPr lang="en-US" sz="1200" b="1" dirty="0">
                         <a:solidFill>
@@ -43018,7 +43018,7 @@
                 <a:ea typeface="Segoe UI" pitchFamily="34" charset="-122"/>
                 <a:cs typeface="Segoe UI" pitchFamily="34" charset="-120"/>
               </a:rPr>
-              <a:t>02  Agent Service  ·  03  Microsoft IQ  ·  13  Toolboxes  ·  04  Agentic Loop  ·  10  Memory</a:t>
+              <a:t>02  Agent Service  ·  03  Microsoft IQ  ·  12  Toolboxes  ·  04  Agentic Loop  ·  10  Memory</a:t>
             </a:r>
             <a:endParaRPr kumimoji="0" lang="en-US" sz="1500" b="0" i="0" u="none" strike="noStrike" kern="1200" cap="none" spc="0" normalizeH="0" baseline="0" noProof="0" dirty="0">
               <a:ln>

--- a/foundry-patterns.pptx
+++ b/foundry-patterns.pptx
@@ -37304,7 +37304,7 @@
                 <a:ea typeface="Segoe UI Semibold" pitchFamily="34" charset="-122"/>
                 <a:cs typeface="Segoe UI Semibold" pitchFamily="34" charset="-120"/>
               </a:rPr>
-              <a:t>The Wedge → AI Hub Gateway / Citadel</a:t>
+              <a:t>Wedge → AI Hub Gateway / Citadel</a:t>
             </a:r>
             <a:endParaRPr kumimoji="0" lang="en-US" sz="2500" b="0" i="0" u="none" strike="noStrike" kern="1200" cap="none" spc="0" normalizeH="0" baseline="0" noProof="0" dirty="0">
               <a:ln>

--- a/foundry-patterns.pptx
+++ b/foundry-patterns.pptx
@@ -21732,7 +21732,7 @@
                 <a:ea typeface="Segoe UI" pitchFamily="34" charset="-122"/>
                 <a:cs typeface="Segoe UI" pitchFamily="34" charset="-120"/>
               </a:rPr>
-              <a:t>Foundry cloud scorecard + CI release gate; a wrong answer blocks the PR.</a:t>
+              <a:t>Generate candidate answers, score in Foundry, fail closed; demo mode plants one regression.</a:t>
             </a:r>
             <a:endParaRPr kumimoji="0" lang="en-US" sz="1200" b="0" i="0" u="none" strike="noStrike" kern="1200" cap="none" spc="0" normalizeH="0" baseline="0" noProof="0" dirty="0">
               <a:ln>
@@ -21911,12 +21911,12 @@
               <a:defRPr/>
             </a:pPr>
             <a:r>
-              <a:rPr kumimoji="0" lang="en-US" sz="950" b="0" i="1" u="none" strike="noStrike" kern="1200" cap="none" spc="0" normalizeH="0" baseline="0" noProof="0" dirty="0">
+              <a:rPr kumimoji="0" lang="en-US" sz="1250" b="1" i="0" u="none" strike="noStrike" kern="1200" cap="none" spc="0" normalizeH="0" baseline="0" noProof="0" dirty="0">
                 <a:ln>
                   <a:noFill/>
                 </a:ln>
                 <a:solidFill>
-                  <a:srgbClr val="605E5C"/>
+                  <a:srgbClr val="8661C5"/>
                 </a:solidFill>
                 <a:effectLst/>
                 <a:uLnTx/>
@@ -21925,22 +21925,8 @@
                 <a:ea typeface="Segoe UI" pitchFamily="34" charset="-122"/>
                 <a:cs typeface="Segoe UI" pitchFamily="34" charset="-120"/>
               </a:rPr>
-              <a:t>+ planted wrong row</a:t>
+              <a:t>questions + policy context</a:t>
             </a:r>
-            <a:endParaRPr kumimoji="0" lang="en-US" sz="1250" b="0" i="0" u="none" strike="noStrike" kern="1200" cap="none" spc="0" normalizeH="0" baseline="0" noProof="0" dirty="0">
-              <a:ln>
-                <a:noFill/>
-              </a:ln>
-              <a:solidFill>
-                <a:prstClr val="black"/>
-              </a:solidFill>
-              <a:effectLst/>
-              <a:uLnTx/>
-              <a:uFillTx/>
-              <a:latin typeface="Calibri" panose="020F0502020204030204"/>
-              <a:ea typeface="+mn-ea"/>
-              <a:cs typeface="+mn-cs"/>
-            </a:endParaRPr>
           </a:p>
         </p:txBody>
       </p:sp>
@@ -22068,7 +22054,7 @@
                 <a:ea typeface="Segoe UI" pitchFamily="34" charset="-122"/>
                 <a:cs typeface="Segoe UI" pitchFamily="34" charset="-120"/>
               </a:rPr>
-              <a:t>Agent</a:t>
+              <a:t>Candidate</a:t>
             </a:r>
             <a:endParaRPr kumimoji="0" lang="en-US" sz="1250" b="0" i="0" u="none" strike="noStrike" kern="1200" cap="none" spc="0" normalizeH="0" baseline="0" noProof="0" dirty="0">
               <a:ln>
@@ -22084,6 +22070,42 @@
               <a:ea typeface="+mn-ea"/>
               <a:cs typeface="+mn-cs"/>
             </a:endParaRPr>
+          </a:p>
+          <a:p>
+            <a:pPr marL="0" marR="0" lvl="0" indent="0" algn="ctr" defTabSz="914400" rtl="0" eaLnBrk="1" fontAlgn="auto" latinLnBrk="0" hangingPunct="1">
+              <a:lnSpc>
+                <a:spcPct val="95000"/>
+              </a:lnSpc>
+              <a:spcBef>
+                <a:spcPts val="0"/>
+              </a:spcBef>
+              <a:spcAft>
+                <a:spcPts val="0"/>
+              </a:spcAft>
+              <a:buClrTx/>
+              <a:buSzTx/>
+              <a:buFontTx/>
+              <a:buNone/>
+              <a:tabLst/>
+              <a:defRPr/>
+            </a:pPr>
+            <a:r>
+              <a:rPr kumimoji="0" lang="en-US" sz="1250" b="1" i="0" u="none" strike="noStrike" kern="1200" cap="none" spc="0" normalizeH="0" baseline="0" noProof="0" dirty="0">
+                <a:ln>
+                  <a:noFill/>
+                </a:ln>
+                <a:solidFill>
+                  <a:srgbClr val="FFFFFF"/>
+                </a:solidFill>
+                <a:effectLst/>
+                <a:uLnTx/>
+                <a:uFillTx/>
+                <a:latin typeface="Segoe UI" pitchFamily="34" charset="0"/>
+                <a:ea typeface="Segoe UI" pitchFamily="34" charset="-122"/>
+                <a:cs typeface="Segoe UI" pitchFamily="34" charset="-120"/>
+              </a:rPr>
+              <a:t>prompt + model</a:t>
+            </a:r>
           </a:p>
         </p:txBody>
       </p:sp>
@@ -22247,12 +22269,12 @@
               <a:defRPr/>
             </a:pPr>
             <a:r>
-              <a:rPr kumimoji="0" lang="en-US" sz="950" b="0" i="1" u="none" strike="noStrike" kern="1200" cap="none" spc="0" normalizeH="0" baseline="0" noProof="0" dirty="0">
+              <a:rPr kumimoji="0" lang="en-US" sz="1250" b="1" i="0" u="none" strike="noStrike" kern="1200" cap="none" spc="0" normalizeH="0" baseline="0" noProof="0" dirty="0">
                 <a:ln>
                   <a:noFill/>
                 </a:ln>
                 <a:solidFill>
-                  <a:srgbClr val="E4F3FC"/>
+                  <a:srgbClr val="FFFFFF"/>
                 </a:solidFill>
                 <a:effectLst/>
                 <a:uLnTx/>
@@ -22261,22 +22283,8 @@
                 <a:ea typeface="Segoe UI" pitchFamily="34" charset="-122"/>
                 <a:cs typeface="Segoe UI" pitchFamily="34" charset="-120"/>
               </a:rPr>
-              <a:t>groundedness · tool-accuracy</a:t>
+              <a:t>groundedness · relevance · coherence</a:t>
             </a:r>
-            <a:endParaRPr kumimoji="0" lang="en-US" sz="1250" b="0" i="0" u="none" strike="noStrike" kern="1200" cap="none" spc="0" normalizeH="0" baseline="0" noProof="0" dirty="0">
-              <a:ln>
-                <a:noFill/>
-              </a:ln>
-              <a:solidFill>
-                <a:prstClr val="black"/>
-              </a:solidFill>
-              <a:effectLst/>
-              <a:uLnTx/>
-              <a:uFillTx/>
-              <a:latin typeface="Calibri" panose="020F0502020204030204"/>
-              <a:ea typeface="+mn-ea"/>
-              <a:cs typeface="+mn-cs"/>
-            </a:endParaRPr>
           </a:p>
         </p:txBody>
       </p:sp>
@@ -23458,7 +23466,7 @@
                 <a:ea typeface="Segoe UI" pitchFamily="34" charset="-122"/>
                 <a:cs typeface="Segoe UI" pitchFamily="34" charset="-120"/>
               </a:rPr>
-              <a:t>Scores locally + uploads to the Foundry Evaluations tab</a:t>
+              <a:t>Candidate answers are generated before cloud evaluation</a:t>
             </a:r>
             <a:endParaRPr kumimoji="0" lang="en-US" sz="1150" b="0" i="0" u="none" strike="noStrike" kern="1200" cap="none" spc="0" normalizeH="0" baseline="0" noProof="0" dirty="0">
               <a:ln>

--- a/foundry-patterns.pptx
+++ b/foundry-patterns.pptx
@@ -23659,7 +23659,7 @@
                 <a:ea typeface="Segoe UI" pitchFamily="34" charset="-122"/>
                 <a:cs typeface="Segoe UI" pitchFamily="34" charset="-120"/>
               </a:rPr>
-              <a:t>CI gate on every PR — regressions can't merge</a:t>
+              <a:t>Scoped CI gate — relevant regressions can't merge</a:t>
             </a:r>
             <a:endParaRPr kumimoji="0" lang="en-US" sz="1150" b="0" i="0" u="none" strike="noStrike" kern="1200" cap="none" spc="0" normalizeH="0" baseline="0" noProof="0" dirty="0">
               <a:ln>

--- a/foundry-patterns.pptx
+++ b/foundry-patterns.pptx
@@ -26891,7 +26891,7 @@
                 <a:ea typeface="Segoe UI" pitchFamily="34" charset="-122"/>
                 <a:cs typeface="Segoe UI" pitchFamily="34" charset="-120"/>
               </a:rPr>
-              <a:t>Token + cost + latency per span — observability &amp; FinOps</a:t>
+              <a:t>Token + latency telemetry · rate-card cost by agent/version</a:t>
             </a:r>
             <a:endParaRPr kumimoji="0" lang="en-US" sz="1150" b="0" i="0" u="none" strike="noStrike" kern="1200" cap="none" spc="0" normalizeH="0" baseline="0" noProof="0" dirty="0">
               <a:ln>
